--- a/Y9_Exploring_Science/9A_Genetics_and_evolution/9A_L02_Inherited_variation.pptx
+++ b/Y9_Exploring_Science/9A_Genetics_and_evolution/9A_L02_Inherited_variation.pptx
@@ -132,7 +132,7 @@
           <a:lstStyle/>
           <a:p>
             <a:pPr>
-              <a:defRPr sz="1400" b="0" i="0" u="none" strike="noStrike">
+              <a:defRPr sz="1600" b="0" i="0" u="none" strike="noStrike">
                 <a:solidFill>
                   <a:srgbClr val="0F2A5F"/>
                 </a:solidFill>
@@ -140,7 +140,7 @@
               </a:defRPr>
             </a:pPr>
             <a:r>
-              <a:rPr sz="1400" b="0" i="0" u="none" strike="noStrike">
+              <a:rPr sz="1600" b="0" i="0" u="none" strike="noStrike">
                 <a:solidFill>
                   <a:srgbClr val="0F2A5F"/>
                 </a:solidFill>
@@ -189,7 +189,7 @@
               <a:lstStyle/>
               <a:p>
                 <a:pPr>
-                  <a:defRPr b="0" i="0" strike="noStrike" sz="1000" u="none">
+                  <a:defRPr b="0" i="0" strike="noStrike" sz="1200" u="none">
                     <a:solidFill>
                       <a:srgbClr val="141B26"/>
                     </a:solidFill>
@@ -257,7 +257,7 @@
             <a:lstStyle/>
             <a:p>
               <a:pPr>
-                <a:defRPr b="0" i="0" strike="noStrike" sz="1000" u="none">
+                <a:defRPr b="0" i="0" strike="noStrike" sz="1200" u="none">
                   <a:solidFill>
                     <a:srgbClr val="141B26"/>
                   </a:solidFill>
@@ -294,7 +294,7 @@
               <a:lstStyle/>
               <a:p>
                 <a:pPr>
-                  <a:defRPr sz="1100" b="0" i="0" u="none" strike="noStrike">
+                  <a:defRPr sz="1300" b="0" i="0" u="none" strike="noStrike">
                     <a:solidFill>
                       <a:srgbClr val="141B26"/>
                     </a:solidFill>
@@ -302,7 +302,7 @@
                   </a:defRPr>
                 </a:pPr>
                 <a:r>
-                  <a:rPr sz="1100" b="0" i="0" u="none" strike="noStrike">
+                  <a:rPr sz="1300" b="0" i="0" u="none" strike="noStrike">
                     <a:solidFill>
                       <a:srgbClr val="141B26"/>
                     </a:solidFill>
@@ -334,7 +334,7 @@
           <a:lstStyle/>
           <a:p>
             <a:pPr>
-              <a:defRPr sz="1100" b="0" i="0" u="none" strike="noStrike">
+              <a:defRPr sz="1300" b="0" i="0" u="none" strike="noStrike">
                 <a:solidFill>
                   <a:srgbClr val="141B26"/>
                 </a:solidFill>
@@ -375,7 +375,7 @@
               <a:lstStyle/>
               <a:p>
                 <a:pPr>
-                  <a:defRPr sz="1100" b="0" i="0" u="none" strike="noStrike">
+                  <a:defRPr sz="1300" b="0" i="0" u="none" strike="noStrike">
                     <a:solidFill>
                       <a:srgbClr val="141B26"/>
                     </a:solidFill>
@@ -383,7 +383,7 @@
                   </a:defRPr>
                 </a:pPr>
                 <a:r>
-                  <a:rPr sz="1100" b="0" i="0" u="none" strike="noStrike">
+                  <a:rPr sz="1300" b="0" i="0" u="none" strike="noStrike">
                     <a:solidFill>
                       <a:srgbClr val="141B26"/>
                     </a:solidFill>
@@ -415,7 +415,7 @@
           <a:lstStyle/>
           <a:p>
             <a:pPr>
-              <a:defRPr sz="1100" b="0" i="0" u="none" strike="noStrike">
+              <a:defRPr sz="1300" b="0" i="0" u="none" strike="noStrike">
                 <a:solidFill>
                   <a:srgbClr val="141B26"/>
                 </a:solidFill>
@@ -465,7 +465,7 @@
           <a:lstStyle/>
           <a:p>
             <a:pPr>
-              <a:defRPr sz="1400" b="0" i="0" u="none" strike="noStrike">
+              <a:defRPr sz="1600" b="0" i="0" u="none" strike="noStrike">
                 <a:solidFill>
                   <a:srgbClr val="0F2A5F"/>
                 </a:solidFill>
@@ -473,7 +473,7 @@
               </a:defRPr>
             </a:pPr>
             <a:r>
-              <a:rPr sz="1400" b="0" i="0" u="none" strike="noStrike">
+              <a:rPr sz="1600" b="0" i="0" u="none" strike="noStrike">
                 <a:solidFill>
                   <a:srgbClr val="0F2A5F"/>
                 </a:solidFill>
@@ -522,7 +522,7 @@
               <a:lstStyle/>
               <a:p>
                 <a:pPr>
-                  <a:defRPr b="0" i="0" strike="noStrike" sz="1000" u="none">
+                  <a:defRPr b="0" i="0" strike="noStrike" sz="1200" u="none">
                     <a:solidFill>
                       <a:srgbClr val="141B26"/>
                     </a:solidFill>
@@ -620,7 +620,7 @@
             <a:lstStyle/>
             <a:p>
               <a:pPr>
-                <a:defRPr b="0" i="0" strike="noStrike" sz="1000" u="none">
+                <a:defRPr b="0" i="0" strike="noStrike" sz="1200" u="none">
                   <a:solidFill>
                     <a:srgbClr val="141B26"/>
                   </a:solidFill>
@@ -657,7 +657,7 @@
               <a:lstStyle/>
               <a:p>
                 <a:pPr>
-                  <a:defRPr sz="1100" b="0" i="0" u="none" strike="noStrike">
+                  <a:defRPr sz="1300" b="0" i="0" u="none" strike="noStrike">
                     <a:solidFill>
                       <a:srgbClr val="141B26"/>
                     </a:solidFill>
@@ -665,7 +665,7 @@
                   </a:defRPr>
                 </a:pPr>
                 <a:r>
-                  <a:rPr sz="1100" b="0" i="0" u="none" strike="noStrike">
+                  <a:rPr sz="1300" b="0" i="0" u="none" strike="noStrike">
                     <a:solidFill>
                       <a:srgbClr val="141B26"/>
                     </a:solidFill>
@@ -697,7 +697,7 @@
           <a:lstStyle/>
           <a:p>
             <a:pPr>
-              <a:defRPr sz="1100" b="0" i="0" u="none" strike="noStrike">
+              <a:defRPr sz="1300" b="0" i="0" u="none" strike="noStrike">
                 <a:solidFill>
                   <a:srgbClr val="141B26"/>
                 </a:solidFill>
@@ -738,7 +738,7 @@
               <a:lstStyle/>
               <a:p>
                 <a:pPr>
-                  <a:defRPr sz="1100" b="0" i="0" u="none" strike="noStrike">
+                  <a:defRPr sz="1300" b="0" i="0" u="none" strike="noStrike">
                     <a:solidFill>
                       <a:srgbClr val="141B26"/>
                     </a:solidFill>
@@ -746,7 +746,7 @@
                   </a:defRPr>
                 </a:pPr>
                 <a:r>
-                  <a:rPr sz="1100" b="0" i="0" u="none" strike="noStrike">
+                  <a:rPr sz="1300" b="0" i="0" u="none" strike="noStrike">
                     <a:solidFill>
                       <a:srgbClr val="141B26"/>
                     </a:solidFill>
@@ -778,7 +778,7 @@
           <a:lstStyle/>
           <a:p>
             <a:pPr>
-              <a:defRPr sz="1100" b="0" i="0" u="none" strike="noStrike">
+              <a:defRPr sz="1300" b="0" i="0" u="none" strike="noStrike">
                 <a:solidFill>
                   <a:srgbClr val="141B26"/>
                 </a:solidFill>
@@ -2525,7 +2525,7 @@
         <p:spPr>
           <a:xfrm>
             <a:off x="548640" y="3657600"/>
-            <a:ext cx="10515600" cy="914400"/>
+            <a:ext cx="10515600" cy="1097280"/>
           </a:xfrm>
           <a:prstGeom prst="rect">
             <a:avLst/>
@@ -2538,7 +2538,7 @@
           <a:lstStyle>
             <a:lvl1pPr indent="0" marL="0">
               <a:buNone/>
-              <a:defRPr lang="en-US" sz="2000" dirty="0">
+              <a:defRPr lang="en-US" sz="2400" dirty="0">
                 <a:solidFill>
                   <a:srgbClr val="FFFFFF"/>
                 </a:solidFill>
@@ -2549,7 +2549,7 @@
             <a:pPr indent="0" marL="0">
               <a:buNone/>
             </a:pPr>
-            <a:endParaRPr lang="en-US" sz="2000" dirty="0"/>
+            <a:endParaRPr lang="en-US" sz="2400" dirty="0"/>
           </a:p>
         </p:txBody>
       </p:sp>
@@ -2649,14 +2649,14 @@
               <a:buNone/>
             </a:pPr>
             <a:r>
-              <a:rPr lang="en-US" sz="900" dirty="0">
+              <a:rPr lang="en-US" sz="1000" dirty="0">
                 <a:solidFill>
                   <a:srgbClr val="5B6574"/>
                 </a:solidFill>
               </a:rPr>
               <a:t>Year 9 Science  |  9A Genetics and evolution  |  Lesson 2: Inherited variation</a:t>
             </a:r>
-            <a:endParaRPr lang="en-US" sz="900" dirty="0"/>
+            <a:endParaRPr lang="en-US" sz="1000" dirty="0"/>
           </a:p>
         </p:txBody>
       </p:sp>
@@ -2825,14 +2825,14 @@
               <a:buNone/>
             </a:pPr>
             <a:r>
-              <a:rPr lang="en-US" sz="900" dirty="0">
+              <a:rPr lang="en-US" sz="1000" dirty="0">
                 <a:solidFill>
                   <a:srgbClr val="5B6574"/>
                 </a:solidFill>
               </a:rPr>
               <a:t>Year 9 Science  |  9A Genetics and evolution  |  Lesson 2: Inherited variation</a:t>
             </a:r>
-            <a:endParaRPr lang="en-US" sz="900" dirty="0"/>
+            <a:endParaRPr lang="en-US" sz="1000" dirty="0"/>
           </a:p>
         </p:txBody>
       </p:sp>
@@ -3001,14 +3001,14 @@
               <a:buNone/>
             </a:pPr>
             <a:r>
-              <a:rPr lang="en-US" sz="900" dirty="0">
+              <a:rPr lang="en-US" sz="1000" dirty="0">
                 <a:solidFill>
                   <a:srgbClr val="5B6574"/>
                 </a:solidFill>
               </a:rPr>
               <a:t>Year 9 Science  |  9A Genetics and evolution  |  Lesson 2: Inherited variation</a:t>
             </a:r>
-            <a:endParaRPr lang="en-US" sz="900" dirty="0"/>
+            <a:endParaRPr lang="en-US" sz="1000" dirty="0"/>
           </a:p>
         </p:txBody>
       </p:sp>
@@ -3137,7 +3137,7 @@
           <a:lstStyle>
             <a:lvl1pPr indent="0" marL="0">
               <a:buNone/>
-              <a:defRPr lang="en-US" sz="3000" b="1" dirty="0">
+              <a:defRPr lang="en-US" sz="3400" b="1" dirty="0">
                 <a:solidFill>
                   <a:srgbClr val="3A2E00"/>
                 </a:solidFill>
@@ -3148,7 +3148,7 @@
             <a:pPr indent="0" marL="0">
               <a:buNone/>
             </a:pPr>
-            <a:endParaRPr lang="en-US" sz="3000" dirty="0"/>
+            <a:endParaRPr lang="en-US" sz="3400" dirty="0"/>
           </a:p>
         </p:txBody>
       </p:sp>
@@ -3565,14 +3565,14 @@
               <a:buNone/>
             </a:pPr>
             <a:r>
-              <a:rPr lang="en-US" sz="1300" b="1" spc="200" kern="0" dirty="0">
+              <a:rPr lang="en-US" sz="1400" b="1" spc="200" kern="0" dirty="0">
                 <a:solidFill>
                   <a:srgbClr val="F2CE3E"/>
                 </a:solidFill>
               </a:rPr>
               <a:t>YEAR 9 SCIENCE  ·  9A GENETICS AND EVOLUTION  ·  LESSON 2 OF 7</a:t>
             </a:r>
-            <a:endParaRPr lang="en-US" sz="1300" dirty="0"/>
+            <a:endParaRPr lang="en-US" sz="1400" dirty="0"/>
           </a:p>
         </p:txBody>
       </p:sp>
@@ -3625,7 +3625,7 @@
         <p:spPr>
           <a:xfrm>
             <a:off x="548640" y="3657600"/>
-            <a:ext cx="10515600" cy="914400"/>
+            <a:ext cx="10515600" cy="1097280"/>
           </a:xfrm>
           <a:prstGeom prst="rect">
             <a:avLst/>
@@ -3641,14 +3641,14 @@
               <a:buNone/>
             </a:pPr>
             <a:r>
-              <a:rPr lang="en-US" sz="2000" dirty="0">
+              <a:rPr lang="en-US" sz="2400" dirty="0">
                 <a:solidFill>
                   <a:srgbClr val="FFFFFF"/>
                 </a:solidFill>
               </a:rPr>
               <a:t>Why do offspring look like their parents, and why are brothers and sisters not identical?</a:t>
             </a:r>
-            <a:endParaRPr lang="en-US" sz="2000" dirty="0"/>
+            <a:endParaRPr lang="en-US" sz="2400" dirty="0"/>
           </a:p>
         </p:txBody>
       </p:sp>
@@ -3677,14 +3677,14 @@
               <a:buNone/>
             </a:pPr>
             <a:r>
-              <a:rPr lang="en-US" sz="1200" dirty="0">
+              <a:rPr lang="en-US" sz="1400" dirty="0">
                 <a:solidFill>
                   <a:srgbClr val="C9D3E6"/>
                 </a:solidFill>
               </a:rPr>
               <a:t>Exploring Science International 9  ·  Student Book pages 8 to 9  ·  Workbook pages 5 to 6</a:t>
             </a:r>
-            <a:endParaRPr lang="en-US" sz="1200" dirty="0"/>
+            <a:endParaRPr lang="en-US" sz="1400" dirty="0"/>
           </a:p>
         </p:txBody>
       </p:sp>
@@ -3863,14 +3863,14 @@
               <a:buNone/>
             </a:pPr>
             <a:r>
-              <a:rPr lang="en-US" sz="1400" i="1" dirty="0">
+              <a:rPr lang="en-US" sz="1600" i="1" dirty="0">
                 <a:solidFill>
                   <a:srgbClr val="5B6574"/>
                 </a:solidFill>
               </a:rPr>
               <a:t>Genes, environment, or both? Then continuous or discontinuous?</a:t>
             </a:r>
-            <a:endParaRPr lang="en-US" sz="1400" dirty="0"/>
+            <a:endParaRPr lang="en-US" sz="1600" dirty="0"/>
           </a:p>
         </p:txBody>
       </p:sp>
@@ -3919,16 +3919,14 @@
           <a:ln/>
         </p:spPr>
         <p:txBody>
-          <a:bodyPr wrap="square" lIns="0" tIns="0" rIns="0" bIns="0" rtlCol="0" anchor="ctr">
-            <a:normAutofit/>
-          </a:bodyPr>
+          <a:bodyPr wrap="square" lIns="0" tIns="0" rIns="0" bIns="0" rtlCol="0" anchor="ctr"/>
           <a:lstStyle/>
           <a:p>
             <a:pPr indent="0" marL="0">
               <a:buNone/>
             </a:pPr>
             <a:r>
-              <a:rPr lang="en-US" sz="1600" b="1" dirty="0">
+              <a:rPr lang="en-US" sz="2000" b="1" dirty="0">
                 <a:solidFill>
                   <a:srgbClr val="7B3A8E"/>
                 </a:solidFill>
@@ -3939,14 +3937,14 @@
               <a:buNone/>
             </a:pPr>
             <a:r>
-              <a:rPr lang="en-US" sz="1600" dirty="0">
+              <a:rPr lang="en-US" sz="2000" dirty="0">
                 <a:solidFill>
                   <a:srgbClr val="141B26"/>
                 </a:solidFill>
               </a:rPr>
               <a:t>Natural eye colour</a:t>
             </a:r>
-            <a:endParaRPr lang="en-US" sz="1600" dirty="0"/>
+            <a:endParaRPr lang="en-US" sz="2000" dirty="0"/>
           </a:p>
         </p:txBody>
       </p:sp>
@@ -3995,16 +3993,14 @@
           <a:ln/>
         </p:spPr>
         <p:txBody>
-          <a:bodyPr wrap="square" lIns="0" tIns="0" rIns="0" bIns="0" rtlCol="0" anchor="ctr">
-            <a:normAutofit/>
-          </a:bodyPr>
+          <a:bodyPr wrap="square" lIns="0" tIns="0" rIns="0" bIns="0" rtlCol="0" anchor="ctr"/>
           <a:lstStyle/>
           <a:p>
             <a:pPr indent="0" marL="0">
               <a:buNone/>
             </a:pPr>
             <a:r>
-              <a:rPr lang="en-US" sz="1600" b="1" dirty="0">
+              <a:rPr lang="en-US" sz="2000" b="1" dirty="0">
                 <a:solidFill>
                   <a:srgbClr val="7B3A8E"/>
                 </a:solidFill>
@@ -4015,14 +4011,14 @@
               <a:buNone/>
             </a:pPr>
             <a:r>
-              <a:rPr lang="en-US" sz="1600" dirty="0">
+              <a:rPr lang="en-US" sz="2000" dirty="0">
                 <a:solidFill>
                   <a:srgbClr val="141B26"/>
                 </a:solidFill>
               </a:rPr>
               <a:t>Being able to speak Chinese</a:t>
             </a:r>
-            <a:endParaRPr lang="en-US" sz="1600" dirty="0"/>
+            <a:endParaRPr lang="en-US" sz="2000" dirty="0"/>
           </a:p>
         </p:txBody>
       </p:sp>
@@ -4071,16 +4067,14 @@
           <a:ln/>
         </p:spPr>
         <p:txBody>
-          <a:bodyPr wrap="square" lIns="0" tIns="0" rIns="0" bIns="0" rtlCol="0" anchor="ctr">
-            <a:normAutofit/>
-          </a:bodyPr>
+          <a:bodyPr wrap="square" lIns="0" tIns="0" rIns="0" bIns="0" rtlCol="0" anchor="ctr"/>
           <a:lstStyle/>
           <a:p>
             <a:pPr indent="0" marL="0">
               <a:buNone/>
             </a:pPr>
             <a:r>
-              <a:rPr lang="en-US" sz="1600" b="1" dirty="0">
+              <a:rPr lang="en-US" sz="2000" b="1" dirty="0">
                 <a:solidFill>
                   <a:srgbClr val="7B3A8E"/>
                 </a:solidFill>
@@ -4091,14 +4085,14 @@
               <a:buNone/>
             </a:pPr>
             <a:r>
-              <a:rPr lang="en-US" sz="1600" dirty="0">
+              <a:rPr lang="en-US" sz="2000" dirty="0">
                 <a:solidFill>
                   <a:srgbClr val="141B26"/>
                 </a:solidFill>
               </a:rPr>
               <a:t>A dimpled chin</a:t>
             </a:r>
-            <a:endParaRPr lang="en-US" sz="1600" dirty="0"/>
+            <a:endParaRPr lang="en-US" sz="2000" dirty="0"/>
           </a:p>
         </p:txBody>
       </p:sp>
@@ -4147,16 +4141,14 @@
           <a:ln/>
         </p:spPr>
         <p:txBody>
-          <a:bodyPr wrap="square" lIns="0" tIns="0" rIns="0" bIns="0" rtlCol="0" anchor="ctr">
-            <a:normAutofit/>
-          </a:bodyPr>
+          <a:bodyPr wrap="square" lIns="0" tIns="0" rIns="0" bIns="0" rtlCol="0" anchor="ctr"/>
           <a:lstStyle/>
           <a:p>
             <a:pPr indent="0" marL="0">
               <a:buNone/>
             </a:pPr>
             <a:r>
-              <a:rPr lang="en-US" sz="1600" b="1" dirty="0">
+              <a:rPr lang="en-US" sz="2000" b="1" dirty="0">
                 <a:solidFill>
                   <a:srgbClr val="7B3A8E"/>
                 </a:solidFill>
@@ -4167,14 +4159,14 @@
               <a:buNone/>
             </a:pPr>
             <a:r>
-              <a:rPr lang="en-US" sz="1600" dirty="0">
+              <a:rPr lang="en-US" sz="2000" dirty="0">
                 <a:solidFill>
                   <a:srgbClr val="141B26"/>
                 </a:solidFill>
               </a:rPr>
               <a:t>Human height</a:t>
             </a:r>
-            <a:endParaRPr lang="en-US" sz="1600" dirty="0"/>
+            <a:endParaRPr lang="en-US" sz="2000" dirty="0"/>
           </a:p>
         </p:txBody>
       </p:sp>
@@ -4223,16 +4215,14 @@
           <a:ln/>
         </p:spPr>
         <p:txBody>
-          <a:bodyPr wrap="square" lIns="0" tIns="0" rIns="0" bIns="0" rtlCol="0" anchor="ctr">
-            <a:normAutofit/>
-          </a:bodyPr>
+          <a:bodyPr wrap="square" lIns="0" tIns="0" rIns="0" bIns="0" rtlCol="0" anchor="ctr"/>
           <a:lstStyle/>
           <a:p>
             <a:pPr indent="0" marL="0">
               <a:buNone/>
             </a:pPr>
             <a:r>
-              <a:rPr lang="en-US" sz="1600" b="1" dirty="0">
+              <a:rPr lang="en-US" sz="2000" b="1" dirty="0">
                 <a:solidFill>
                   <a:srgbClr val="7B3A8E"/>
                 </a:solidFill>
@@ -4243,14 +4233,14 @@
               <a:buNone/>
             </a:pPr>
             <a:r>
-              <a:rPr lang="en-US" sz="1600" dirty="0">
+              <a:rPr lang="en-US" sz="2000" dirty="0">
                 <a:solidFill>
                   <a:srgbClr val="141B26"/>
                 </a:solidFill>
               </a:rPr>
               <a:t>Blood group</a:t>
             </a:r>
-            <a:endParaRPr lang="en-US" sz="1600" dirty="0"/>
+            <a:endParaRPr lang="en-US" sz="2000" dirty="0"/>
           </a:p>
         </p:txBody>
       </p:sp>
@@ -4579,23 +4569,21 @@
           <a:ln/>
         </p:spPr>
         <p:txBody>
-          <a:bodyPr wrap="square" lIns="0" tIns="0" rIns="0" bIns="0" rtlCol="0" anchor="t">
-            <a:normAutofit/>
-          </a:bodyPr>
+          <a:bodyPr wrap="square" lIns="0" tIns="0" rIns="0" bIns="0" rtlCol="0" anchor="t"/>
           <a:lstStyle/>
           <a:p>
             <a:pPr indent="0" marL="0">
               <a:buNone/>
             </a:pPr>
             <a:r>
-              <a:rPr lang="en-US" sz="1700" dirty="0">
+              <a:rPr lang="en-US" sz="2000" dirty="0">
                 <a:solidFill>
                   <a:srgbClr val="141B26"/>
                 </a:solidFill>
               </a:rPr>
               <a:t>Class survey: hands up for tongue rolling (can or cannot) and ear lobes (attached or free). Record the totals in the Core tally table.</a:t>
             </a:r>
-            <a:endParaRPr lang="en-US" sz="1700" dirty="0"/>
+            <a:endParaRPr lang="en-US" sz="2000" dirty="0"/>
           </a:p>
         </p:txBody>
       </p:sp>
@@ -4678,23 +4666,21 @@
           <a:ln/>
         </p:spPr>
         <p:txBody>
-          <a:bodyPr wrap="square" lIns="0" tIns="0" rIns="0" bIns="0" rtlCol="0" anchor="t">
-            <a:normAutofit/>
-          </a:bodyPr>
+          <a:bodyPr wrap="square" lIns="0" tIns="0" rIns="0" bIns="0" rtlCol="0" anchor="t"/>
           <a:lstStyle/>
           <a:p>
             <a:pPr indent="0" marL="0">
               <a:buNone/>
             </a:pPr>
             <a:r>
-              <a:rPr lang="en-US" sz="1700" dirty="0">
+              <a:rPr lang="en-US" sz="2000" dirty="0">
                 <a:solidFill>
                   <a:srgbClr val="141B26"/>
                 </a:solidFill>
               </a:rPr>
               <a:t>In pairs, measure your hand span to the nearest 0.5 cm; the teacher collects the class list for the Stretch grid.</a:t>
             </a:r>
-            <a:endParaRPr lang="en-US" sz="1700" dirty="0"/>
+            <a:endParaRPr lang="en-US" sz="2000" dirty="0"/>
           </a:p>
         </p:txBody>
       </p:sp>
@@ -4777,23 +4763,21 @@
           <a:ln/>
         </p:spPr>
         <p:txBody>
-          <a:bodyPr wrap="square" lIns="0" tIns="0" rIns="0" bIns="0" rtlCol="0" anchor="t">
-            <a:normAutofit/>
-          </a:bodyPr>
+          <a:bodyPr wrap="square" lIns="0" tIns="0" rIns="0" bIns="0" rtlCol="0" anchor="t"/>
           <a:lstStyle/>
           <a:p>
             <a:pPr indent="0" marL="0">
               <a:buNone/>
             </a:pPr>
             <a:r>
-              <a:rPr lang="en-US" sz="1700" dirty="0">
+              <a:rPr lang="en-US" sz="2000" dirty="0">
                 <a:solidFill>
                   <a:srgbClr val="141B26"/>
                 </a:solidFill>
               </a:rPr>
               <a:t>Core: gap fill, the cause of each characteristic, the survey.</a:t>
             </a:r>
-            <a:endParaRPr lang="en-US" sz="1700" dirty="0"/>
+            <a:endParaRPr lang="en-US" sz="2000" dirty="0"/>
           </a:p>
         </p:txBody>
       </p:sp>
@@ -4876,23 +4860,21 @@
           <a:ln/>
         </p:spPr>
         <p:txBody>
-          <a:bodyPr wrap="square" lIns="0" tIns="0" rIns="0" bIns="0" rtlCol="0" anchor="t">
-            <a:normAutofit/>
-          </a:bodyPr>
+          <a:bodyPr wrap="square" lIns="0" tIns="0" rIns="0" bIns="0" rtlCol="0" anchor="t"/>
           <a:lstStyle/>
           <a:p>
             <a:pPr indent="0" marL="0">
               <a:buNone/>
             </a:pPr>
             <a:r>
-              <a:rPr lang="en-US" sz="1700" dirty="0">
+              <a:rPr lang="en-US" sz="2000" dirty="0">
                 <a:solidFill>
                   <a:srgbClr val="141B26"/>
                 </a:solidFill>
               </a:rPr>
               <a:t>Stretch: blood group bar chart; foot length and shoe size; why brothers and sisters differ.</a:t>
             </a:r>
-            <a:endParaRPr lang="en-US" sz="1700" dirty="0"/>
+            <a:endParaRPr lang="en-US" sz="2000" dirty="0"/>
           </a:p>
         </p:txBody>
       </p:sp>
@@ -4975,23 +4957,21 @@
           <a:ln/>
         </p:spPr>
         <p:txBody>
-          <a:bodyPr wrap="square" lIns="0" tIns="0" rIns="0" bIns="0" rtlCol="0" anchor="t">
-            <a:normAutofit/>
-          </a:bodyPr>
+          <a:bodyPr wrap="square" lIns="0" tIns="0" rIns="0" bIns="0" rtlCol="0" anchor="t"/>
           <a:lstStyle/>
           <a:p>
             <a:pPr indent="0" marL="0">
               <a:buNone/>
             </a:pPr>
             <a:r>
-              <a:rPr lang="en-US" sz="1700" dirty="0">
+              <a:rPr lang="en-US" sz="2000" dirty="0">
                 <a:solidFill>
                   <a:srgbClr val="141B26"/>
                 </a:solidFill>
               </a:rPr>
               <a:t>Challenge: tomatoes, and the height histogram.</a:t>
             </a:r>
-            <a:endParaRPr lang="en-US" sz="1700" dirty="0"/>
+            <a:endParaRPr lang="en-US" sz="2000" dirty="0"/>
           </a:p>
         </p:txBody>
       </p:sp>
@@ -5020,14 +5000,14 @@
               <a:buNone/>
             </a:pPr>
             <a:r>
-              <a:rPr lang="en-US" sz="1300" i="1" dirty="0">
+              <a:rPr lang="en-US" sz="1500" i="1" dirty="0">
                 <a:solidFill>
                   <a:srgbClr val="5B6574"/>
                 </a:solidFill>
               </a:rPr>
               <a:t>Use the key words. Chinese answers are fine for the reasons; use the English key words.</a:t>
             </a:r>
-            <a:endParaRPr lang="en-US" sz="1300" dirty="0"/>
+            <a:endParaRPr lang="en-US" sz="1500" dirty="0"/>
           </a:p>
         </p:txBody>
       </p:sp>
@@ -5220,23 +5200,21 @@
           <a:ln/>
         </p:spPr>
         <p:txBody>
-          <a:bodyPr wrap="square" lIns="0" tIns="0" rIns="0" bIns="0" rtlCol="0" anchor="t">
-            <a:normAutofit/>
-          </a:bodyPr>
+          <a:bodyPr wrap="square" lIns="0" tIns="0" rIns="0" bIns="0" rtlCol="0" anchor="t"/>
           <a:lstStyle/>
           <a:p>
             <a:pPr indent="0" marL="0">
               <a:buNone/>
             </a:pPr>
             <a:r>
-              <a:rPr lang="en-US" sz="2200" b="1" dirty="0">
+              <a:rPr lang="en-US" sz="2600" b="1" dirty="0">
                 <a:solidFill>
                   <a:srgbClr val="0F2A5F"/>
                 </a:solidFill>
               </a:rPr>
               <a:t>Two tall parents have a child who is shorter than both of them. Use the words genetic information, gametes and environment to explain how this can happen.</a:t>
             </a:r>
-            <a:endParaRPr lang="en-US" sz="2200" dirty="0"/>
+            <a:endParaRPr lang="en-US" sz="2600" dirty="0"/>
           </a:p>
         </p:txBody>
       </p:sp>
@@ -5285,9 +5263,7 @@
           <a:ln/>
         </p:spPr>
         <p:txBody>
-          <a:bodyPr wrap="square" lIns="0" tIns="0" rIns="0" bIns="0" rtlCol="0" anchor="t">
-            <a:normAutofit/>
-          </a:bodyPr>
+          <a:bodyPr wrap="square" lIns="0" tIns="0" rIns="0" bIns="0" rtlCol="0" anchor="t"/>
           <a:lstStyle/>
           <a:p>
             <a:pPr indent="0" marL="0">
@@ -5297,14 +5273,14 @@
               <a:buNone/>
             </a:pPr>
             <a:r>
-              <a:rPr lang="en-US" sz="1500" b="1" dirty="0">
+              <a:rPr lang="en-US" sz="1800" b="1" dirty="0">
                 <a:solidFill>
                   <a:srgbClr val="7B3A8E"/>
                 </a:solidFill>
               </a:rPr>
               <a:t>Sentence frames</a:t>
             </a:r>
-            <a:endParaRPr lang="en-US" sz="1500" dirty="0"/>
+            <a:endParaRPr lang="en-US" sz="1800" dirty="0"/>
           </a:p>
           <a:p>
             <a:pPr indent="0" marL="0">
@@ -5314,14 +5290,14 @@
               <a:buNone/>
             </a:pPr>
             <a:r>
-              <a:rPr lang="en-US" sz="1500" dirty="0">
+              <a:rPr lang="en-US" sz="1800" dirty="0">
                 <a:solidFill>
                   <a:srgbClr val="141B26"/>
                 </a:solidFill>
               </a:rPr>
               <a:t>The child inherited genetic information from ___, but each gamete carries ___.</a:t>
             </a:r>
-            <a:endParaRPr lang="en-US" sz="1500" dirty="0"/>
+            <a:endParaRPr lang="en-US" sz="1800" dirty="0"/>
           </a:p>
           <a:p>
             <a:pPr indent="0" marL="0">
@@ -5331,14 +5307,14 @@
               <a:buNone/>
             </a:pPr>
             <a:r>
-              <a:rPr lang="en-US" sz="1500" dirty="0">
+              <a:rPr lang="en-US" sz="1800" dirty="0">
                 <a:solidFill>
                   <a:srgbClr val="141B26"/>
                 </a:solidFill>
               </a:rPr>
               <a:t>Height is also affected by ___, for example ___.</a:t>
             </a:r>
-            <a:endParaRPr lang="en-US" sz="1500" dirty="0"/>
+            <a:endParaRPr lang="en-US" sz="1800" dirty="0"/>
           </a:p>
           <a:p>
             <a:pPr indent="0" marL="0">
@@ -5348,14 +5324,14 @@
               <a:buNone/>
             </a:pPr>
             <a:r>
-              <a:rPr lang="en-US" sz="1500" dirty="0">
+              <a:rPr lang="en-US" sz="1800" dirty="0">
                 <a:solidFill>
                   <a:srgbClr val="141B26"/>
                 </a:solidFill>
               </a:rPr>
               <a:t>So the child could be shorter because ___.</a:t>
             </a:r>
-            <a:endParaRPr lang="en-US" sz="1500" dirty="0"/>
+            <a:endParaRPr lang="en-US" sz="1800" dirty="0"/>
           </a:p>
         </p:txBody>
       </p:sp>
@@ -5555,14 +5531,14 @@
               <a:buNone/>
             </a:pPr>
             <a:r>
-              <a:rPr lang="en-US" sz="1400" i="1" dirty="0">
+              <a:rPr lang="en-US" sz="1600" i="1" dirty="0">
                 <a:solidFill>
                   <a:srgbClr val="5B6574"/>
                 </a:solidFill>
               </a:rPr>
               <a:t>On your worksheet exit ticket. Work alone. Hand it in as you leave.</a:t>
             </a:r>
-            <a:endParaRPr lang="en-US" sz="1400" dirty="0"/>
+            <a:endParaRPr lang="en-US" sz="1600" dirty="0"/>
           </a:p>
         </p:txBody>
       </p:sp>
@@ -5575,7 +5551,7 @@
         <p:spPr>
           <a:xfrm>
             <a:off x="548640" y="1828800"/>
-            <a:ext cx="10881360" cy="1188720"/>
+            <a:ext cx="9692640" cy="1188720"/>
           </a:xfrm>
           <a:prstGeom prst="rect">
             <a:avLst/>
@@ -5584,16 +5560,14 @@
           <a:ln/>
         </p:spPr>
         <p:txBody>
-          <a:bodyPr wrap="square" lIns="0" tIns="0" rIns="0" bIns="0" rtlCol="0" anchor="t">
-            <a:normAutofit/>
-          </a:bodyPr>
+          <a:bodyPr wrap="square" lIns="0" tIns="0" rIns="0" bIns="0" rtlCol="0" anchor="t"/>
           <a:lstStyle/>
           <a:p>
             <a:pPr indent="0" marL="0">
               <a:buNone/>
             </a:pPr>
             <a:r>
-              <a:rPr lang="en-US" sz="1800" b="1" dirty="0">
+              <a:rPr lang="en-US" sz="2200" b="1" dirty="0">
                 <a:solidFill>
                   <a:srgbClr val="7B3A8E"/>
                 </a:solidFill>
@@ -5604,14 +5578,14 @@
               <a:buNone/>
             </a:pPr>
             <a:r>
-              <a:rPr lang="en-US" sz="1800" dirty="0">
+              <a:rPr lang="en-US" sz="2200" dirty="0">
                 <a:solidFill>
                   <a:srgbClr val="141B26"/>
                 </a:solidFill>
               </a:rPr>
               <a:t>Where in a cell is genetic information stored?</a:t>
             </a:r>
-            <a:endParaRPr lang="en-US" sz="1800" dirty="0"/>
+            <a:endParaRPr lang="en-US" sz="2200" dirty="0"/>
           </a:p>
         </p:txBody>
       </p:sp>
@@ -5624,7 +5598,7 @@
         <p:spPr>
           <a:xfrm>
             <a:off x="548640" y="3017520"/>
-            <a:ext cx="10881360" cy="1188720"/>
+            <a:ext cx="9692640" cy="1188720"/>
           </a:xfrm>
           <a:prstGeom prst="rect">
             <a:avLst/>
@@ -5633,16 +5607,14 @@
           <a:ln/>
         </p:spPr>
         <p:txBody>
-          <a:bodyPr wrap="square" lIns="0" tIns="0" rIns="0" bIns="0" rtlCol="0" anchor="t">
-            <a:normAutofit/>
-          </a:bodyPr>
+          <a:bodyPr wrap="square" lIns="0" tIns="0" rIns="0" bIns="0" rtlCol="0" anchor="t"/>
           <a:lstStyle/>
           <a:p>
             <a:pPr indent="0" marL="0">
               <a:buNone/>
             </a:pPr>
             <a:r>
-              <a:rPr lang="en-US" sz="1800" b="1" dirty="0">
+              <a:rPr lang="en-US" sz="2200" b="1" dirty="0">
                 <a:solidFill>
                   <a:srgbClr val="7B3A8E"/>
                 </a:solidFill>
@@ -5653,14 +5625,14 @@
               <a:buNone/>
             </a:pPr>
             <a:r>
-              <a:rPr lang="en-US" sz="1800" dirty="0">
+              <a:rPr lang="en-US" sz="2200" dirty="0">
                 <a:solidFill>
                   <a:srgbClr val="141B26"/>
                 </a:solidFill>
               </a:rPr>
               <a:t>Name the cell formed when two gametes fuse.</a:t>
             </a:r>
-            <a:endParaRPr lang="en-US" sz="1800" dirty="0"/>
+            <a:endParaRPr lang="en-US" sz="2200" dirty="0"/>
           </a:p>
         </p:txBody>
       </p:sp>
@@ -5673,7 +5645,7 @@
         <p:spPr>
           <a:xfrm>
             <a:off x="548640" y="4206240"/>
-            <a:ext cx="10881360" cy="1188720"/>
+            <a:ext cx="9692640" cy="1188720"/>
           </a:xfrm>
           <a:prstGeom prst="rect">
             <a:avLst/>
@@ -5682,16 +5654,14 @@
           <a:ln/>
         </p:spPr>
         <p:txBody>
-          <a:bodyPr wrap="square" lIns="0" tIns="0" rIns="0" bIns="0" rtlCol="0" anchor="t">
-            <a:normAutofit/>
-          </a:bodyPr>
+          <a:bodyPr wrap="square" lIns="0" tIns="0" rIns="0" bIns="0" rtlCol="0" anchor="t"/>
           <a:lstStyle/>
           <a:p>
             <a:pPr indent="0" marL="0">
               <a:buNone/>
             </a:pPr>
             <a:r>
-              <a:rPr lang="en-US" sz="1800" b="1" dirty="0">
+              <a:rPr lang="en-US" sz="2200" b="1" dirty="0">
                 <a:solidFill>
                   <a:srgbClr val="7B3A8E"/>
                 </a:solidFill>
@@ -5702,14 +5672,14 @@
               <a:buNone/>
             </a:pPr>
             <a:r>
-              <a:rPr lang="en-US" sz="1800" dirty="0">
+              <a:rPr lang="en-US" sz="2200" dirty="0">
                 <a:solidFill>
                   <a:srgbClr val="141B26"/>
                 </a:solidFill>
               </a:rPr>
               <a:t>Blood group: is it continuous or discontinuous, and inherited or environmental?</a:t>
             </a:r>
-            <a:endParaRPr lang="en-US" sz="1800" dirty="0"/>
+            <a:endParaRPr lang="en-US" sz="2200" dirty="0"/>
           </a:p>
         </p:txBody>
       </p:sp>
@@ -5968,7 +5938,7 @@
         <p:spPr>
           <a:xfrm>
             <a:off x="548640" y="1371600"/>
-            <a:ext cx="10881360" cy="4480560"/>
+            <a:ext cx="10881360" cy="4114800"/>
           </a:xfrm>
           <a:prstGeom prst="rect">
             <a:avLst/>
@@ -5977,81 +5947,79 @@
           <a:ln/>
         </p:spPr>
         <p:txBody>
-          <a:bodyPr wrap="square" lIns="0" tIns="0" rIns="0" bIns="0" rtlCol="0" anchor="t">
-            <a:normAutofit/>
-          </a:bodyPr>
+          <a:bodyPr wrap="square" lIns="0" tIns="0" rIns="0" bIns="0" rtlCol="0" anchor="t"/>
           <a:lstStyle/>
           <a:p>
             <a:pPr marL="342900" indent="-342900">
               <a:spcAft>
-                <a:spcPts val="1000"/>
+                <a:spcPts val="1200"/>
               </a:spcAft>
               <a:buSzPct val="100000"/>
               <a:buChar char="✓"/>
             </a:pPr>
             <a:r>
-              <a:rPr lang="en-US" sz="1700" dirty="0">
+              <a:rPr lang="en-US" sz="2000" dirty="0">
                 <a:solidFill>
                   <a:srgbClr val="141B26"/>
                 </a:solidFill>
               </a:rPr>
               <a:t>Offspring inherit a mixture of characteristics because two different gametes fuse at fertilisation.</a:t>
             </a:r>
-            <a:endParaRPr lang="en-US" sz="1700" dirty="0"/>
+            <a:endParaRPr lang="en-US" sz="2000" dirty="0"/>
           </a:p>
           <a:p>
             <a:pPr marL="342900" indent="-342900">
               <a:spcAft>
-                <a:spcPts val="1000"/>
+                <a:spcPts val="1200"/>
               </a:spcAft>
               <a:buSzPct val="100000"/>
               <a:buChar char="✓"/>
             </a:pPr>
             <a:r>
-              <a:rPr lang="en-US" sz="1700" dirty="0">
+              <a:rPr lang="en-US" sz="2000" dirty="0">
                 <a:solidFill>
                   <a:srgbClr val="141B26"/>
                 </a:solidFill>
               </a:rPr>
               <a:t>Genetic information is stored in genes in the nucleus; the zygote has information from both parents.</a:t>
             </a:r>
-            <a:endParaRPr lang="en-US" sz="1700" dirty="0"/>
+            <a:endParaRPr lang="en-US" sz="2000" dirty="0"/>
           </a:p>
           <a:p>
             <a:pPr marL="342900" indent="-342900">
               <a:spcAft>
-                <a:spcPts val="1000"/>
+                <a:spcPts val="1200"/>
               </a:spcAft>
               <a:buSzPct val="100000"/>
               <a:buChar char="✓"/>
             </a:pPr>
             <a:r>
-              <a:rPr lang="en-US" sz="1700" dirty="0">
+              <a:rPr lang="en-US" sz="2000" dirty="0">
                 <a:solidFill>
                   <a:srgbClr val="141B26"/>
                 </a:solidFill>
               </a:rPr>
               <a:t>Inherited variation can be discontinuous (blood group) or continuous (height, which the environment also affects).</a:t>
             </a:r>
-            <a:endParaRPr lang="en-US" sz="1700" dirty="0"/>
+            <a:endParaRPr lang="en-US" sz="2000" dirty="0"/>
           </a:p>
           <a:p>
             <a:pPr marL="342900" indent="-342900">
               <a:spcAft>
-                <a:spcPts val="1000"/>
+                <a:spcPts val="1200"/>
               </a:spcAft>
               <a:buSzPct val="100000"/>
               <a:buChar char="✓"/>
             </a:pPr>
             <a:r>
-              <a:rPr lang="en-US" sz="1700" dirty="0">
+              <a:rPr lang="en-US" sz="2000" dirty="0">
                 <a:solidFill>
                   <a:srgbClr val="141B26"/>
                 </a:solidFill>
               </a:rPr>
               <a:t>Grouped continuous data give a bell shape: a normal distribution.</a:t>
             </a:r>
-            <a:endParaRPr lang="en-US" sz="1700" dirty="0"/>
+            <a:endParaRPr lang="en-US" sz="2000" dirty="0"/>
           </a:p>
         </p:txBody>
       </p:sp>
@@ -6080,7 +6048,7 @@
               <a:buNone/>
             </a:pPr>
             <a:r>
-              <a:rPr lang="en-US" sz="1300" b="1" dirty="0">
+              <a:rPr lang="en-US" sz="1400" b="1" dirty="0">
                 <a:solidFill>
                   <a:srgbClr val="7B3A8E"/>
                 </a:solidFill>
@@ -6091,14 +6059,14 @@
               <a:buNone/>
             </a:pPr>
             <a:r>
-              <a:rPr lang="en-US" sz="1300" dirty="0">
+              <a:rPr lang="en-US" sz="1400" dirty="0">
                 <a:solidFill>
                   <a:srgbClr val="141B26"/>
                 </a:solidFill>
               </a:rPr>
               <a:t>Probability: how we use statistics and probability to describe variation and predict inherited conditions.</a:t>
             </a:r>
-            <a:endParaRPr lang="en-US" sz="1300" dirty="0"/>
+            <a:endParaRPr lang="en-US" sz="1400" dirty="0"/>
           </a:p>
         </p:txBody>
       </p:sp>
@@ -6366,60 +6334,58 @@
           <a:ln/>
         </p:spPr>
         <p:txBody>
-          <a:bodyPr wrap="square" lIns="0" tIns="0" rIns="0" bIns="0" rtlCol="0" anchor="t">
-            <a:normAutofit/>
-          </a:bodyPr>
+          <a:bodyPr wrap="square" lIns="0" tIns="0" rIns="0" bIns="0" rtlCol="0" anchor="t"/>
           <a:lstStyle/>
           <a:p>
             <a:pPr indent="0" marL="0">
               <a:spcAft>
-                <a:spcPts val="1000"/>
+                <a:spcPts val="1200"/>
               </a:spcAft>
               <a:buNone/>
             </a:pPr>
             <a:r>
-              <a:rPr lang="en-US" sz="2000" dirty="0">
+              <a:rPr lang="en-US" sz="2400" dirty="0">
                 <a:solidFill>
                   <a:srgbClr val="141B26"/>
                 </a:solidFill>
               </a:rPr>
               <a:t>1. Give two ways these kittens vary from each other.</a:t>
             </a:r>
-            <a:endParaRPr lang="en-US" sz="2000" dirty="0"/>
+            <a:endParaRPr lang="en-US" sz="2400" dirty="0"/>
           </a:p>
           <a:p>
             <a:pPr indent="0" marL="0">
               <a:spcAft>
-                <a:spcPts val="1000"/>
+                <a:spcPts val="1200"/>
               </a:spcAft>
               <a:buNone/>
             </a:pPr>
             <a:r>
-              <a:rPr lang="en-US" sz="2000" dirty="0">
+              <a:rPr lang="en-US" sz="2400" dirty="0">
                 <a:solidFill>
                   <a:srgbClr val="141B26"/>
                 </a:solidFill>
               </a:rPr>
               <a:t>2. Which of these differences did they inherit from their parents?</a:t>
             </a:r>
-            <a:endParaRPr lang="en-US" sz="2000" dirty="0"/>
+            <a:endParaRPr lang="en-US" sz="2400" dirty="0"/>
           </a:p>
           <a:p>
             <a:pPr indent="0" marL="0">
               <a:spcAft>
-                <a:spcPts val="1000"/>
+                <a:spcPts val="1200"/>
               </a:spcAft>
               <a:buNone/>
             </a:pPr>
             <a:r>
-              <a:rPr lang="en-US" sz="2000" dirty="0">
+              <a:rPr lang="en-US" sz="2400" dirty="0">
                 <a:solidFill>
                   <a:srgbClr val="141B26"/>
                 </a:solidFill>
               </a:rPr>
               <a:t>3. From last lesson: is a scar inherited or environmental variation?</a:t>
             </a:r>
-            <a:endParaRPr lang="en-US" sz="2000" dirty="0"/>
+            <a:endParaRPr lang="en-US" sz="2400" dirty="0"/>
           </a:p>
         </p:txBody>
       </p:sp>
@@ -6456,7 +6422,7 @@
         <p:spPr>
           <a:xfrm>
             <a:off x="6858000" y="4633586"/>
-            <a:ext cx="4754880" cy="502920"/>
+            <a:ext cx="4754880" cy="548640"/>
           </a:xfrm>
           <a:prstGeom prst="rect">
             <a:avLst/>
@@ -6472,7 +6438,7 @@
               <a:buNone/>
             </a:pPr>
             <a:r>
-              <a:rPr lang="en-US" sz="1100" dirty="0">
+              <a:rPr lang="en-US" sz="1300" dirty="0">
                 <a:solidFill>
                   <a:srgbClr val="141B26"/>
                 </a:solidFill>
@@ -6482,21 +6448,21 @@
             <a:pPr algn="l" indent="0" marL="0">
               <a:buNone/>
             </a:pPr>
-            <a:endParaRPr lang="en-US" sz="1100" dirty="0"/>
+            <a:endParaRPr lang="en-US" sz="1300" dirty="0"/>
           </a:p>
           <a:p>
             <a:pPr algn="l" indent="0" marL="0">
               <a:buNone/>
             </a:pPr>
             <a:r>
-              <a:rPr lang="en-US" sz="800" dirty="0">
+              <a:rPr lang="en-US" sz="900" dirty="0">
                 <a:solidFill>
                   <a:srgbClr val="5B6574"/>
                 </a:solidFill>
               </a:rPr>
               <a:t>Image: Santa Monica Mountains National Recreation Area, Public domain, via Wikimedia Commons</a:t>
             </a:r>
-            <a:endParaRPr lang="en-US" sz="1100" dirty="0"/>
+            <a:endParaRPr lang="en-US" sz="1300" dirty="0"/>
           </a:p>
         </p:txBody>
       </p:sp>
@@ -6679,8 +6645,8 @@
         </p:nvSpPr>
         <p:spPr>
           <a:xfrm>
-            <a:off x="548640" y="1325880"/>
-            <a:ext cx="5669280" cy="457200"/>
+            <a:off x="548640" y="1280160"/>
+            <a:ext cx="5486400" cy="411480"/>
           </a:xfrm>
           <a:prstGeom prst="rect">
             <a:avLst/>
@@ -6696,14 +6662,14 @@
               <a:buNone/>
             </a:pPr>
             <a:r>
-              <a:rPr lang="en-US" sz="2000" b="1" dirty="0">
+              <a:rPr lang="en-US" sz="2200" b="1" dirty="0">
                 <a:solidFill>
                   <a:srgbClr val="7B3A8E"/>
                 </a:solidFill>
               </a:rPr>
               <a:t>Today I can ...</a:t>
             </a:r>
-            <a:endParaRPr lang="en-US" sz="2000" dirty="0"/>
+            <a:endParaRPr lang="en-US" sz="2200" dirty="0"/>
           </a:p>
         </p:txBody>
       </p:sp>
@@ -6715,8 +6681,8 @@
         </p:nvSpPr>
         <p:spPr>
           <a:xfrm>
-            <a:off x="594360" y="1947672"/>
-            <a:ext cx="292608" cy="292608"/>
+            <a:off x="594360" y="1810512"/>
+            <a:ext cx="310896" cy="310896"/>
           </a:xfrm>
           <a:prstGeom prst="rect">
             <a:avLst/>
@@ -6740,8 +6706,8 @@
         </p:nvSpPr>
         <p:spPr>
           <a:xfrm>
-            <a:off x="1051560" y="1874520"/>
-            <a:ext cx="5120640" cy="868680"/>
+            <a:off x="1097280" y="1737360"/>
+            <a:ext cx="10332720" cy="868680"/>
           </a:xfrm>
           <a:prstGeom prst="rect">
             <a:avLst/>
@@ -6750,23 +6716,21 @@
           <a:ln/>
         </p:spPr>
         <p:txBody>
-          <a:bodyPr wrap="square" lIns="0" tIns="0" rIns="0" bIns="0" rtlCol="0" anchor="t">
-            <a:normAutofit/>
-          </a:bodyPr>
+          <a:bodyPr wrap="square" lIns="0" tIns="0" rIns="0" bIns="0" rtlCol="0" anchor="t"/>
           <a:lstStyle/>
           <a:p>
             <a:pPr indent="0" marL="0">
               <a:buNone/>
             </a:pPr>
             <a:r>
-              <a:rPr lang="en-US" sz="1600" dirty="0">
+              <a:rPr lang="en-US" sz="2000" dirty="0">
                 <a:solidFill>
                   <a:srgbClr val="141B26"/>
                 </a:solidFill>
               </a:rPr>
               <a:t>I can give examples of inherited variation and explain how sexual reproduction causes it.</a:t>
             </a:r>
-            <a:endParaRPr lang="en-US" sz="1600" dirty="0"/>
+            <a:endParaRPr lang="en-US" sz="2000" dirty="0"/>
           </a:p>
         </p:txBody>
       </p:sp>
@@ -6778,8 +6742,8 @@
         </p:nvSpPr>
         <p:spPr>
           <a:xfrm>
-            <a:off x="594360" y="2907792"/>
-            <a:ext cx="292608" cy="292608"/>
+            <a:off x="594360" y="2679192"/>
+            <a:ext cx="310896" cy="310896"/>
           </a:xfrm>
           <a:prstGeom prst="rect">
             <a:avLst/>
@@ -6803,8 +6767,8 @@
         </p:nvSpPr>
         <p:spPr>
           <a:xfrm>
-            <a:off x="1051560" y="2834640"/>
-            <a:ext cx="5120640" cy="868680"/>
+            <a:off x="1097280" y="2606040"/>
+            <a:ext cx="10332720" cy="868680"/>
           </a:xfrm>
           <a:prstGeom prst="rect">
             <a:avLst/>
@@ -6813,23 +6777,21 @@
           <a:ln/>
         </p:spPr>
         <p:txBody>
-          <a:bodyPr wrap="square" lIns="0" tIns="0" rIns="0" bIns="0" rtlCol="0" anchor="t">
-            <a:normAutofit/>
-          </a:bodyPr>
+          <a:bodyPr wrap="square" lIns="0" tIns="0" rIns="0" bIns="0" rtlCol="0" anchor="t"/>
           <a:lstStyle/>
           <a:p>
             <a:pPr indent="0" marL="0">
               <a:buNone/>
             </a:pPr>
             <a:r>
-              <a:rPr lang="en-US" sz="1600" dirty="0">
+              <a:rPr lang="en-US" sz="2000" dirty="0">
                 <a:solidFill>
                   <a:srgbClr val="141B26"/>
                 </a:solidFill>
               </a:rPr>
               <a:t>I can sort inherited variation into continuous and discontinuous, and recognise a normal distribution.</a:t>
             </a:r>
-            <a:endParaRPr lang="en-US" sz="1600" dirty="0"/>
+            <a:endParaRPr lang="en-US" sz="2000" dirty="0"/>
           </a:p>
         </p:txBody>
       </p:sp>
@@ -6841,8 +6803,8 @@
         </p:nvSpPr>
         <p:spPr>
           <a:xfrm>
-            <a:off x="6583680" y="1325880"/>
-            <a:ext cx="5029200" cy="457200"/>
+            <a:off x="548640" y="3611880"/>
+            <a:ext cx="5486400" cy="411480"/>
           </a:xfrm>
           <a:prstGeom prst="rect">
             <a:avLst/>
@@ -6858,14 +6820,14 @@
               <a:buNone/>
             </a:pPr>
             <a:r>
-              <a:rPr lang="en-US" sz="2000" b="1" dirty="0">
+              <a:rPr lang="en-US" sz="2200" b="1" dirty="0">
                 <a:solidFill>
                   <a:srgbClr val="7B3A8E"/>
                 </a:solidFill>
               </a:rPr>
               <a:t>Key words today</a:t>
             </a:r>
-            <a:endParaRPr lang="en-US" sz="2000" dirty="0"/>
+            <a:endParaRPr lang="en-US" sz="2200" dirty="0"/>
           </a:p>
         </p:txBody>
       </p:sp>
@@ -6877,8 +6839,8 @@
         </p:nvSpPr>
         <p:spPr>
           <a:xfrm>
-            <a:off x="6583680" y="1874520"/>
-            <a:ext cx="5029200" cy="4023360"/>
+            <a:off x="548640" y="4069080"/>
+            <a:ext cx="3515258" cy="1920240"/>
           </a:xfrm>
           <a:prstGeom prst="rect">
             <a:avLst/>
@@ -6887,350 +6849,285 @@
           <a:ln/>
         </p:spPr>
         <p:txBody>
-          <a:bodyPr wrap="square" lIns="0" tIns="0" rIns="0" bIns="0" rtlCol="0" anchor="t">
-            <a:normAutofit/>
-          </a:bodyPr>
+          <a:bodyPr wrap="square" lIns="0" tIns="0" rIns="0" bIns="0" rtlCol="0" anchor="t"/>
+          <a:lstStyle/>
+          <a:p>
+            <a:pPr marL="304800" indent="-304800">
+              <a:spcAft>
+                <a:spcPts val="600"/>
+              </a:spcAft>
+              <a:buSzPct val="100000"/>
+              <a:buChar char="•"/>
+            </a:pPr>
+            <a:r>
+              <a:rPr lang="en-US" sz="2100" b="1" dirty="0">
+                <a:solidFill>
+                  <a:srgbClr val="0F2A5F"/>
+                </a:solidFill>
+              </a:rPr>
+              <a:t>inherited variation</a:t>
+            </a:r>
+            <a:endParaRPr lang="en-US" sz="2100" dirty="0"/>
+          </a:p>
+          <a:p>
+            <a:pPr marL="304800" indent="-304800">
+              <a:spcAft>
+                <a:spcPts val="600"/>
+              </a:spcAft>
+              <a:buSzPct val="100000"/>
+              <a:buChar char="•"/>
+            </a:pPr>
+            <a:r>
+              <a:rPr lang="en-US" sz="2100" b="1" dirty="0">
+                <a:solidFill>
+                  <a:srgbClr val="0F2A5F"/>
+                </a:solidFill>
+              </a:rPr>
+              <a:t>offspring</a:t>
+            </a:r>
+            <a:endParaRPr lang="en-US" sz="2100" dirty="0"/>
+          </a:p>
+          <a:p>
+            <a:pPr marL="304800" indent="-304800">
+              <a:spcAft>
+                <a:spcPts val="600"/>
+              </a:spcAft>
+              <a:buSzPct val="100000"/>
+              <a:buChar char="•"/>
+            </a:pPr>
+            <a:r>
+              <a:rPr lang="en-US" sz="2100" b="1" dirty="0">
+                <a:solidFill>
+                  <a:srgbClr val="0F2A5F"/>
+                </a:solidFill>
+              </a:rPr>
+              <a:t>genetic information</a:t>
+            </a:r>
+            <a:endParaRPr lang="en-US" sz="2100" dirty="0"/>
+          </a:p>
+          <a:p>
+            <a:pPr marL="304800" indent="-304800">
+              <a:spcAft>
+                <a:spcPts val="600"/>
+              </a:spcAft>
+              <a:buSzPct val="100000"/>
+              <a:buChar char="•"/>
+            </a:pPr>
+            <a:r>
+              <a:rPr lang="en-US" sz="2100" b="1" dirty="0">
+                <a:solidFill>
+                  <a:srgbClr val="0F2A5F"/>
+                </a:solidFill>
+              </a:rPr>
+              <a:t>gene</a:t>
+            </a:r>
+            <a:endParaRPr lang="en-US" sz="2100" dirty="0"/>
+          </a:p>
+        </p:txBody>
+      </p:sp>
+      <p:sp>
+        <p:nvSpPr>
+          <p:cNvPr id="12" name="Text 10"/>
+          <p:cNvSpPr txBox="1"/>
+          <p:nvPr/>
+        </p:nvSpPr>
+        <p:spPr>
+          <a:xfrm>
+            <a:off x="4338218" y="4069080"/>
+            <a:ext cx="3515258" cy="1920240"/>
+          </a:xfrm>
+          <a:prstGeom prst="rect">
+            <a:avLst/>
+          </a:prstGeom>
+          <a:noFill/>
+          <a:ln/>
+        </p:spPr>
+        <p:txBody>
+          <a:bodyPr wrap="square" lIns="0" tIns="0" rIns="0" bIns="0" rtlCol="0" anchor="t"/>
+          <a:lstStyle/>
+          <a:p>
+            <a:pPr marL="304800" indent="-304800">
+              <a:spcAft>
+                <a:spcPts val="600"/>
+              </a:spcAft>
+              <a:buSzPct val="100000"/>
+              <a:buChar char="•"/>
+            </a:pPr>
+            <a:r>
+              <a:rPr lang="en-US" sz="2100" b="1" dirty="0">
+                <a:solidFill>
+                  <a:srgbClr val="0F2A5F"/>
+                </a:solidFill>
+              </a:rPr>
+              <a:t>nucleus</a:t>
+            </a:r>
+            <a:endParaRPr lang="en-US" sz="2100" dirty="0"/>
+          </a:p>
+          <a:p>
+            <a:pPr marL="304800" indent="-304800">
+              <a:spcAft>
+                <a:spcPts val="600"/>
+              </a:spcAft>
+              <a:buSzPct val="100000"/>
+              <a:buChar char="•"/>
+            </a:pPr>
+            <a:r>
+              <a:rPr lang="en-US" sz="2100" b="1" dirty="0">
+                <a:solidFill>
+                  <a:srgbClr val="0F2A5F"/>
+                </a:solidFill>
+              </a:rPr>
+              <a:t>gamete</a:t>
+            </a:r>
+            <a:endParaRPr lang="en-US" sz="2100" dirty="0"/>
+          </a:p>
+          <a:p>
+            <a:pPr marL="304800" indent="-304800">
+              <a:spcAft>
+                <a:spcPts val="600"/>
+              </a:spcAft>
+              <a:buSzPct val="100000"/>
+              <a:buChar char="•"/>
+            </a:pPr>
+            <a:r>
+              <a:rPr lang="en-US" sz="2100" b="1" dirty="0">
+                <a:solidFill>
+                  <a:srgbClr val="0F2A5F"/>
+                </a:solidFill>
+              </a:rPr>
+              <a:t>fertilisation</a:t>
+            </a:r>
+            <a:endParaRPr lang="en-US" sz="2100" dirty="0"/>
+          </a:p>
+          <a:p>
+            <a:pPr marL="304800" indent="-304800">
+              <a:spcAft>
+                <a:spcPts val="600"/>
+              </a:spcAft>
+              <a:buSzPct val="100000"/>
+              <a:buChar char="•"/>
+            </a:pPr>
+            <a:r>
+              <a:rPr lang="en-US" sz="2100" b="1" dirty="0">
+                <a:solidFill>
+                  <a:srgbClr val="0F2A5F"/>
+                </a:solidFill>
+              </a:rPr>
+              <a:t>zygote</a:t>
+            </a:r>
+            <a:endParaRPr lang="en-US" sz="2100" dirty="0"/>
+          </a:p>
+        </p:txBody>
+      </p:sp>
+      <p:sp>
+        <p:nvSpPr>
+          <p:cNvPr id="13" name="Text 11"/>
+          <p:cNvSpPr txBox="1"/>
+          <p:nvPr/>
+        </p:nvSpPr>
+        <p:spPr>
+          <a:xfrm>
+            <a:off x="8127797" y="4069080"/>
+            <a:ext cx="3515258" cy="1920240"/>
+          </a:xfrm>
+          <a:prstGeom prst="rect">
+            <a:avLst/>
+          </a:prstGeom>
+          <a:noFill/>
+          <a:ln/>
+        </p:spPr>
+        <p:txBody>
+          <a:bodyPr wrap="square" lIns="0" tIns="0" rIns="0" bIns="0" rtlCol="0" anchor="t"/>
+          <a:lstStyle/>
+          <a:p>
+            <a:pPr marL="304800" indent="-304800">
+              <a:spcAft>
+                <a:spcPts val="600"/>
+              </a:spcAft>
+              <a:buSzPct val="100000"/>
+              <a:buChar char="•"/>
+            </a:pPr>
+            <a:r>
+              <a:rPr lang="en-US" sz="2200" b="1" dirty="0">
+                <a:solidFill>
+                  <a:srgbClr val="0F2A5F"/>
+                </a:solidFill>
+              </a:rPr>
+              <a:t>continuous variation</a:t>
+            </a:r>
+            <a:endParaRPr lang="en-US" sz="2200" dirty="0"/>
+          </a:p>
+          <a:p>
+            <a:pPr marL="304800" indent="-304800">
+              <a:spcAft>
+                <a:spcPts val="600"/>
+              </a:spcAft>
+              <a:buSzPct val="100000"/>
+              <a:buChar char="•"/>
+            </a:pPr>
+            <a:r>
+              <a:rPr lang="en-US" sz="2200" b="1" dirty="0">
+                <a:solidFill>
+                  <a:srgbClr val="0F2A5F"/>
+                </a:solidFill>
+              </a:rPr>
+              <a:t>discontinuous variation</a:t>
+            </a:r>
+            <a:endParaRPr lang="en-US" sz="2200" dirty="0"/>
+          </a:p>
+          <a:p>
+            <a:pPr marL="304800" indent="-304800">
+              <a:spcAft>
+                <a:spcPts val="600"/>
+              </a:spcAft>
+              <a:buSzPct val="100000"/>
+              <a:buChar char="•"/>
+            </a:pPr>
+            <a:r>
+              <a:rPr lang="en-US" sz="2200" b="1" dirty="0">
+                <a:solidFill>
+                  <a:srgbClr val="0F2A5F"/>
+                </a:solidFill>
+              </a:rPr>
+              <a:t>normal distribution</a:t>
+            </a:r>
+            <a:endParaRPr lang="en-US" sz="2200" dirty="0"/>
+          </a:p>
+        </p:txBody>
+      </p:sp>
+      <p:sp>
+        <p:nvSpPr>
+          <p:cNvPr id="14" name="Text 12"/>
+          <p:cNvSpPr txBox="1"/>
+          <p:nvPr/>
+        </p:nvSpPr>
+        <p:spPr>
+          <a:xfrm>
+            <a:off x="548640" y="6035040"/>
+            <a:ext cx="10881360" cy="320040"/>
+          </a:xfrm>
+          <a:prstGeom prst="rect">
+            <a:avLst/>
+          </a:prstGeom>
+          <a:noFill/>
+          <a:ln/>
+        </p:spPr>
+        <p:txBody>
+          <a:bodyPr wrap="square" lIns="0" tIns="0" rIns="0" bIns="0" rtlCol="0" anchor="ctr"/>
           <a:lstStyle/>
           <a:p>
             <a:pPr indent="0" marL="0">
-              <a:spcAft>
-                <a:spcPts val="500"/>
-              </a:spcAft>
-              <a:buNone/>
-            </a:pPr>
-            <a:r>
-              <a:rPr lang="en-US" sz="1300" b="1" dirty="0">
-                <a:solidFill>
-                  <a:srgbClr val="0F2A5F"/>
-                </a:solidFill>
-              </a:rPr>
-              <a:t>inherited variation</a:t>
-            </a:r>
-            <a:pPr indent="0" marL="0">
-              <a:spcAft>
-                <a:spcPts val="500"/>
-              </a:spcAft>
-              <a:buNone/>
-            </a:pPr>
-            <a:r>
-              <a:rPr lang="en-US" sz="1300" dirty="0">
-                <a:solidFill>
-                  <a:srgbClr val="141B26"/>
-                </a:solidFill>
-              </a:rPr>
-              <a:t>  differences in characteristics that are passed on from parents to offspring</a:t>
-            </a:r>
-            <a:endParaRPr lang="en-US" sz="1300" dirty="0"/>
-          </a:p>
-          <a:p>
-            <a:pPr indent="0" marL="0">
-              <a:spcAft>
-                <a:spcPts val="500"/>
-              </a:spcAft>
-              <a:buNone/>
-            </a:pPr>
-            <a:r>
-              <a:rPr lang="en-US" sz="1300" b="1" dirty="0">
-                <a:solidFill>
-                  <a:srgbClr val="0F2A5F"/>
-                </a:solidFill>
-              </a:rPr>
-              <a:t>offspring</a:t>
-            </a:r>
-            <a:pPr indent="0" marL="0">
-              <a:spcAft>
-                <a:spcPts val="500"/>
-              </a:spcAft>
-              <a:buNone/>
-            </a:pPr>
-            <a:r>
-              <a:rPr lang="en-US" sz="1300" dirty="0">
-                <a:solidFill>
-                  <a:srgbClr val="141B26"/>
-                </a:solidFill>
-              </a:rPr>
-              <a:t>  the young produced by parents</a:t>
-            </a:r>
-            <a:endParaRPr lang="en-US" sz="1300" dirty="0"/>
-          </a:p>
-          <a:p>
-            <a:pPr indent="0" marL="0">
-              <a:spcAft>
-                <a:spcPts val="500"/>
-              </a:spcAft>
-              <a:buNone/>
-            </a:pPr>
-            <a:r>
-              <a:rPr lang="en-US" sz="1300" b="1" dirty="0">
-                <a:solidFill>
-                  <a:srgbClr val="0F2A5F"/>
-                </a:solidFill>
-              </a:rPr>
-              <a:t>genetic information</a:t>
-            </a:r>
-            <a:pPr indent="0" marL="0">
-              <a:spcAft>
-                <a:spcPts val="500"/>
-              </a:spcAft>
-              <a:buNone/>
-            </a:pPr>
-            <a:r>
-              <a:rPr lang="en-US" sz="1300" dirty="0">
-                <a:solidFill>
-                  <a:srgbClr val="141B26"/>
-                </a:solidFill>
-              </a:rPr>
-              <a:t>  the instructions for inherited characteristics, stored in the nucleus</a:t>
-            </a:r>
-            <a:endParaRPr lang="en-US" sz="1300" dirty="0"/>
-          </a:p>
-          <a:p>
-            <a:pPr indent="0" marL="0">
-              <a:spcAft>
-                <a:spcPts val="500"/>
-              </a:spcAft>
-              <a:buNone/>
-            </a:pPr>
-            <a:r>
-              <a:rPr lang="en-US" sz="1300" b="1" dirty="0">
-                <a:solidFill>
-                  <a:srgbClr val="0F2A5F"/>
-                </a:solidFill>
-              </a:rPr>
-              <a:t>gene</a:t>
-            </a:r>
-            <a:pPr indent="0" marL="0">
-              <a:spcAft>
-                <a:spcPts val="500"/>
-              </a:spcAft>
-              <a:buNone/>
-            </a:pPr>
-            <a:r>
-              <a:rPr lang="en-US" sz="1300" dirty="0">
-                <a:solidFill>
-                  <a:srgbClr val="141B26"/>
-                </a:solidFill>
-              </a:rPr>
-              <a:t>  a section of DNA that carries the instructions for one characteristic</a:t>
-            </a:r>
-            <a:endParaRPr lang="en-US" sz="1300" dirty="0"/>
-          </a:p>
-          <a:p>
-            <a:pPr indent="0" marL="0">
-              <a:spcAft>
-                <a:spcPts val="500"/>
-              </a:spcAft>
-              <a:buNone/>
-            </a:pPr>
-            <a:r>
-              <a:rPr lang="en-US" sz="1300" b="1" dirty="0">
-                <a:solidFill>
-                  <a:srgbClr val="0F2A5F"/>
-                </a:solidFill>
-              </a:rPr>
-              <a:t>nucleus</a:t>
-            </a:r>
-            <a:pPr indent="0" marL="0">
-              <a:spcAft>
-                <a:spcPts val="500"/>
-              </a:spcAft>
-              <a:buNone/>
-            </a:pPr>
-            <a:r>
-              <a:rPr lang="en-US" sz="1300" dirty="0">
-                <a:solidFill>
-                  <a:srgbClr val="141B26"/>
-                </a:solidFill>
-              </a:rPr>
-              <a:t>  the part of a cell that contains the genetic information</a:t>
-            </a:r>
-            <a:endParaRPr lang="en-US" sz="1300" dirty="0"/>
-          </a:p>
-          <a:p>
-            <a:pPr indent="0" marL="0">
-              <a:spcAft>
-                <a:spcPts val="500"/>
-              </a:spcAft>
-              <a:buNone/>
-            </a:pPr>
-            <a:r>
-              <a:rPr lang="en-US" sz="1300" b="1" dirty="0">
-                <a:solidFill>
-                  <a:srgbClr val="0F2A5F"/>
-                </a:solidFill>
-              </a:rPr>
-              <a:t>gamete</a:t>
-            </a:r>
-            <a:pPr indent="0" marL="0">
-              <a:spcAft>
-                <a:spcPts val="500"/>
-              </a:spcAft>
-              <a:buNone/>
-            </a:pPr>
-            <a:r>
-              <a:rPr lang="en-US" sz="1300" dirty="0">
-                <a:solidFill>
-                  <a:srgbClr val="141B26"/>
-                </a:solidFill>
-              </a:rPr>
-              <a:t>  a sex cell (a sperm cell or an egg cell)</a:t>
-            </a:r>
-            <a:endParaRPr lang="en-US" sz="1300" dirty="0"/>
-          </a:p>
-          <a:p>
-            <a:pPr indent="0" marL="0">
-              <a:spcAft>
-                <a:spcPts val="500"/>
-              </a:spcAft>
-              <a:buNone/>
-            </a:pPr>
-            <a:r>
-              <a:rPr lang="en-US" sz="1300" b="1" dirty="0">
-                <a:solidFill>
-                  <a:srgbClr val="0F2A5F"/>
-                </a:solidFill>
-              </a:rPr>
-              <a:t>fertilisation</a:t>
-            </a:r>
-            <a:pPr indent="0" marL="0">
-              <a:spcAft>
-                <a:spcPts val="500"/>
-              </a:spcAft>
-              <a:buNone/>
-            </a:pPr>
-            <a:r>
-              <a:rPr lang="en-US" sz="1300" dirty="0">
-                <a:solidFill>
-                  <a:srgbClr val="141B26"/>
-                </a:solidFill>
-              </a:rPr>
-              <a:t>  when a male gamete and a female gamete fuse (join together)</a:t>
-            </a:r>
-            <a:endParaRPr lang="en-US" sz="1300" dirty="0"/>
-          </a:p>
-          <a:p>
-            <a:pPr indent="0" marL="0">
-              <a:spcAft>
-                <a:spcPts val="500"/>
-              </a:spcAft>
-              <a:buNone/>
-            </a:pPr>
-            <a:r>
-              <a:rPr lang="en-US" sz="1300" b="1" dirty="0">
-                <a:solidFill>
-                  <a:srgbClr val="0F2A5F"/>
-                </a:solidFill>
-              </a:rPr>
-              <a:t>zygote</a:t>
-            </a:r>
-            <a:pPr indent="0" marL="0">
-              <a:spcAft>
-                <a:spcPts val="500"/>
-              </a:spcAft>
-              <a:buNone/>
-            </a:pPr>
-            <a:r>
-              <a:rPr lang="en-US" sz="1300" dirty="0">
-                <a:solidFill>
-                  <a:srgbClr val="141B26"/>
-                </a:solidFill>
-              </a:rPr>
-              <a:t>  the fertilised egg cell</a:t>
-            </a:r>
-            <a:endParaRPr lang="en-US" sz="1300" dirty="0"/>
-          </a:p>
-          <a:p>
-            <a:pPr indent="0" marL="0">
-              <a:spcAft>
-                <a:spcPts val="500"/>
-              </a:spcAft>
-              <a:buNone/>
-            </a:pPr>
-            <a:r>
-              <a:rPr lang="en-US" sz="1300" b="1" dirty="0">
-                <a:solidFill>
-                  <a:srgbClr val="0F2A5F"/>
-                </a:solidFill>
-              </a:rPr>
-              <a:t>continuous variation</a:t>
-            </a:r>
-            <a:pPr indent="0" marL="0">
-              <a:spcAft>
-                <a:spcPts val="500"/>
-              </a:spcAft>
-              <a:buNone/>
-            </a:pPr>
-            <a:r>
-              <a:rPr lang="en-US" sz="1300" dirty="0">
-                <a:solidFill>
-                  <a:srgbClr val="141B26"/>
-                </a:solidFill>
-              </a:rPr>
-              <a:t>  variation that can have any value between two points</a:t>
-            </a:r>
-            <a:endParaRPr lang="en-US" sz="1300" dirty="0"/>
-          </a:p>
-          <a:p>
-            <a:pPr indent="0" marL="0">
-              <a:spcAft>
-                <a:spcPts val="500"/>
-              </a:spcAft>
-              <a:buNone/>
-            </a:pPr>
-            <a:r>
-              <a:rPr lang="en-US" sz="1300" b="1" dirty="0">
-                <a:solidFill>
-                  <a:srgbClr val="0F2A5F"/>
-                </a:solidFill>
-              </a:rPr>
-              <a:t>discontinuous variation</a:t>
-            </a:r>
-            <a:pPr indent="0" marL="0">
-              <a:spcAft>
-                <a:spcPts val="500"/>
-              </a:spcAft>
-              <a:buNone/>
-            </a:pPr>
-            <a:r>
-              <a:rPr lang="en-US" sz="1300" dirty="0">
-                <a:solidFill>
-                  <a:srgbClr val="141B26"/>
-                </a:solidFill>
-              </a:rPr>
-              <a:t>  variation with only a limited set of possible values</a:t>
-            </a:r>
-            <a:endParaRPr lang="en-US" sz="1300" dirty="0"/>
-          </a:p>
-          <a:p>
-            <a:pPr indent="0" marL="0">
-              <a:spcAft>
-                <a:spcPts val="500"/>
-              </a:spcAft>
-              <a:buNone/>
-            </a:pPr>
-            <a:r>
-              <a:rPr lang="en-US" sz="1300" b="1" dirty="0">
-                <a:solidFill>
-                  <a:srgbClr val="0F2A5F"/>
-                </a:solidFill>
-              </a:rPr>
-              <a:t>normal distribution</a:t>
-            </a:r>
-            <a:pPr indent="0" marL="0">
-              <a:spcAft>
-                <a:spcPts val="500"/>
-              </a:spcAft>
-              <a:buNone/>
-            </a:pPr>
-            <a:r>
-              <a:rPr lang="en-US" sz="1300" dirty="0">
-                <a:solidFill>
-                  <a:srgbClr val="141B26"/>
-                </a:solidFill>
-              </a:rPr>
-              <a:t>  the bell shape you get when grouped continuous data are plotted</a:t>
-            </a:r>
-            <a:endParaRPr lang="en-US" sz="1300" dirty="0"/>
+              <a:buNone/>
+            </a:pPr>
+            <a:r>
+              <a:rPr lang="en-US" sz="1400" i="1" dirty="0">
+                <a:solidFill>
+                  <a:srgbClr val="5B6574"/>
+                </a:solidFill>
+              </a:rPr>
+              <a:t>Meanings are in the key words box on your worksheet.</a:t>
+            </a:r>
+            <a:endParaRPr lang="en-US" sz="1400" dirty="0"/>
           </a:p>
         </p:txBody>
       </p:sp>
@@ -7414,7 +7311,7 @@
         <p:spPr>
           <a:xfrm>
             <a:off x="548640" y="1371600"/>
-            <a:ext cx="5394960" cy="2377440"/>
+            <a:ext cx="5394960" cy="2651760"/>
           </a:xfrm>
           <a:prstGeom prst="rect">
             <a:avLst/>
@@ -7423,23 +7320,21 @@
           <a:ln/>
         </p:spPr>
         <p:txBody>
-          <a:bodyPr wrap="square" lIns="0" tIns="0" rIns="0" bIns="0" rtlCol="0" anchor="t">
-            <a:normAutofit/>
-          </a:bodyPr>
+          <a:bodyPr wrap="square" lIns="0" tIns="0" rIns="0" bIns="0" rtlCol="0" anchor="t"/>
           <a:lstStyle/>
           <a:p>
             <a:pPr indent="0" marL="0">
               <a:buNone/>
             </a:pPr>
             <a:r>
-              <a:rPr lang="en-US" sz="2800" b="1" dirty="0">
+              <a:rPr lang="en-US" sz="3000" b="1" dirty="0">
                 <a:solidFill>
                   <a:srgbClr val="0F2A5F"/>
                 </a:solidFill>
               </a:rPr>
               <a:t>Dragon fruit come in different skin colours, flesh colours and sizes. Give three examples of inherited variation in dragon fruit.</a:t>
             </a:r>
-            <a:endParaRPr lang="en-US" sz="2800" dirty="0"/>
+            <a:endParaRPr lang="en-US" sz="3000" dirty="0"/>
           </a:p>
         </p:txBody>
       </p:sp>
@@ -7451,8 +7346,8 @@
         </p:nvSpPr>
         <p:spPr>
           <a:xfrm>
-            <a:off x="548640" y="3794760"/>
-            <a:ext cx="5394960" cy="2103120"/>
+            <a:off x="548640" y="4114800"/>
+            <a:ext cx="5394960" cy="1828800"/>
           </a:xfrm>
           <a:prstGeom prst="rect">
             <a:avLst/>
@@ -7461,9 +7356,7 @@
           <a:ln/>
         </p:spPr>
         <p:txBody>
-          <a:bodyPr wrap="square" lIns="0" tIns="0" rIns="0" bIns="0" rtlCol="0" anchor="t">
-            <a:normAutofit/>
-          </a:bodyPr>
+          <a:bodyPr wrap="square" lIns="0" tIns="0" rIns="0" bIns="0" rtlCol="0" anchor="t"/>
           <a:lstStyle/>
           <a:p>
             <a:pPr indent="0" marL="0">
@@ -7473,14 +7366,14 @@
               <a:buNone/>
             </a:pPr>
             <a:r>
-              <a:rPr lang="en-US" sz="1600" dirty="0">
+              <a:rPr lang="en-US" sz="2000" dirty="0">
                 <a:solidFill>
                   <a:srgbClr val="141B26"/>
                 </a:solidFill>
               </a:rPr>
               <a:t>Then decide: which of these could a grower change by giving the plants more water or light?</a:t>
             </a:r>
-            <a:endParaRPr lang="en-US" sz="1600" dirty="0"/>
+            <a:endParaRPr lang="en-US" sz="2000" dirty="0"/>
           </a:p>
         </p:txBody>
       </p:sp>
@@ -7517,7 +7410,7 @@
         <p:spPr>
           <a:xfrm>
             <a:off x="6309360" y="5532120"/>
-            <a:ext cx="5303520" cy="502920"/>
+            <a:ext cx="5303520" cy="548640"/>
           </a:xfrm>
           <a:prstGeom prst="rect">
             <a:avLst/>
@@ -7533,7 +7426,7 @@
               <a:buNone/>
             </a:pPr>
             <a:r>
-              <a:rPr lang="en-US" sz="1100" dirty="0">
+              <a:rPr lang="en-US" sz="1300" dirty="0">
                 <a:solidFill>
                   <a:srgbClr val="141B26"/>
                 </a:solidFill>
@@ -7543,21 +7436,21 @@
             <a:pPr algn="l" indent="0" marL="0">
               <a:buNone/>
             </a:pPr>
-            <a:endParaRPr lang="en-US" sz="1100" dirty="0"/>
+            <a:endParaRPr lang="en-US" sz="1300" dirty="0"/>
           </a:p>
           <a:p>
             <a:pPr algn="l" indent="0" marL="0">
               <a:buNone/>
             </a:pPr>
             <a:r>
-              <a:rPr lang="en-US" sz="800" dirty="0">
+              <a:rPr lang="en-US" sz="900" dirty="0">
                 <a:solidFill>
                   <a:srgbClr val="5B6574"/>
                 </a:solidFill>
               </a:rPr>
               <a:t>Image: Tijs Zwinkels, CC BY-SA 2.0, via Wikimedia Commons</a:t>
             </a:r>
-            <a:endParaRPr lang="en-US" sz="1100" dirty="0"/>
+            <a:endParaRPr lang="en-US" sz="1300" dirty="0"/>
           </a:p>
         </p:txBody>
       </p:sp>
@@ -7740,8 +7633,8 @@
         </p:nvSpPr>
         <p:spPr>
           <a:xfrm>
-            <a:off x="548640" y="6053328"/>
-            <a:ext cx="9601200" cy="292608"/>
+            <a:off x="548640" y="6035040"/>
+            <a:ext cx="9601200" cy="310896"/>
           </a:xfrm>
           <a:prstGeom prst="rect">
             <a:avLst/>
@@ -7757,7 +7650,7 @@
               <a:buNone/>
             </a:pPr>
             <a:r>
-              <a:rPr lang="en-US" sz="1200" b="1" dirty="0">
+              <a:rPr lang="en-US" sz="1400" b="1" dirty="0">
                 <a:solidFill>
                   <a:srgbClr val="7B3A8E"/>
                 </a:solidFill>
@@ -7768,14 +7661,14 @@
               <a:buNone/>
             </a:pPr>
             <a:r>
-              <a:rPr lang="en-US" sz="1200" dirty="0">
+              <a:rPr lang="en-US" sz="1400" dirty="0">
                 <a:solidFill>
                   <a:srgbClr val="7B3A8E"/>
                 </a:solidFill>
               </a:rPr>
               <a:t>inherited variation   ·   offspring</a:t>
             </a:r>
-            <a:endParaRPr lang="en-US" sz="1200" dirty="0"/>
+            <a:endParaRPr lang="en-US" sz="1400" dirty="0"/>
           </a:p>
         </p:txBody>
       </p:sp>
@@ -7797,81 +7690,79 @@
           <a:ln/>
         </p:spPr>
         <p:txBody>
-          <a:bodyPr wrap="square" lIns="0" tIns="0" rIns="0" bIns="0" rtlCol="0" anchor="t">
-            <a:normAutofit/>
-          </a:bodyPr>
-          <a:lstStyle/>
-          <a:p>
-            <a:pPr marL="228600" indent="-228600">
+          <a:bodyPr wrap="square" lIns="0" tIns="0" rIns="0" bIns="0" rtlCol="0" anchor="t"/>
+          <a:lstStyle/>
+          <a:p>
+            <a:pPr marL="304800" indent="-304800">
               <a:spcAft>
-                <a:spcPts val="600"/>
+                <a:spcPts val="800"/>
               </a:spcAft>
               <a:buSzPct val="100000"/>
               <a:buChar char="•"/>
             </a:pPr>
             <a:r>
-              <a:rPr lang="en-US" sz="1700" dirty="0">
+              <a:rPr lang="en-US" sz="2000" dirty="0">
                 <a:solidFill>
                   <a:srgbClr val="141B26"/>
                 </a:solidFill>
               </a:rPr>
               <a:t>Offspring get a mixture of characteristics from their parents. We say they inherit them.</a:t>
             </a:r>
-            <a:endParaRPr lang="en-US" sz="1700" dirty="0"/>
-          </a:p>
-          <a:p>
-            <a:pPr marL="228600" indent="-228600">
+            <a:endParaRPr lang="en-US" sz="2000" dirty="0"/>
+          </a:p>
+          <a:p>
+            <a:pPr marL="304800" indent="-304800">
               <a:spcAft>
-                <a:spcPts val="600"/>
+                <a:spcPts val="800"/>
               </a:spcAft>
               <a:buSzPct val="100000"/>
               <a:buChar char="•"/>
             </a:pPr>
             <a:r>
-              <a:rPr lang="en-US" sz="1700" dirty="0">
+              <a:rPr lang="en-US" sz="2000" dirty="0">
                 <a:solidFill>
                   <a:srgbClr val="141B26"/>
                 </a:solidFill>
               </a:rPr>
               <a:t>Inherited variation: natural eye colour, dimpled chin, blood group.</a:t>
             </a:r>
-            <a:endParaRPr lang="en-US" sz="1700" dirty="0"/>
-          </a:p>
-          <a:p>
-            <a:pPr marL="228600" indent="-228600">
+            <a:endParaRPr lang="en-US" sz="2000" dirty="0"/>
+          </a:p>
+          <a:p>
+            <a:pPr marL="304800" indent="-304800">
               <a:spcAft>
-                <a:spcPts val="600"/>
+                <a:spcPts val="800"/>
               </a:spcAft>
               <a:buSzPct val="100000"/>
               <a:buChar char="•"/>
             </a:pPr>
             <a:r>
-              <a:rPr lang="en-US" sz="1700" dirty="0">
+              <a:rPr lang="en-US" sz="2000" dirty="0">
                 <a:solidFill>
                   <a:srgbClr val="141B26"/>
                 </a:solidFill>
               </a:rPr>
               <a:t>Environmental variation (a scar, a hairstyle) is not inherited.</a:t>
             </a:r>
-            <a:endParaRPr lang="en-US" sz="1700" dirty="0"/>
-          </a:p>
-          <a:p>
-            <a:pPr marL="228600" indent="-228600">
+            <a:endParaRPr lang="en-US" sz="2000" dirty="0"/>
+          </a:p>
+          <a:p>
+            <a:pPr marL="304800" indent="-304800">
               <a:spcAft>
-                <a:spcPts val="600"/>
+                <a:spcPts val="800"/>
               </a:spcAft>
               <a:buSzPct val="100000"/>
               <a:buChar char="•"/>
             </a:pPr>
             <a:r>
-              <a:rPr lang="en-US" sz="1700" dirty="0">
+              <a:rPr lang="en-US" sz="2000" dirty="0">
                 <a:solidFill>
                   <a:srgbClr val="141B26"/>
                 </a:solidFill>
               </a:rPr>
               <a:t>Some characteristics are caused by both: tall parents have tall children only if the children eat well.</a:t>
             </a:r>
-            <a:endParaRPr lang="en-US" sz="1700" dirty="0"/>
+            <a:endParaRPr lang="en-US" sz="2000" dirty="0"/>
           </a:p>
         </p:txBody>
       </p:sp>
@@ -7908,7 +7799,7 @@
         <p:spPr>
           <a:xfrm>
             <a:off x="6583680" y="4477119"/>
-            <a:ext cx="5029200" cy="502920"/>
+            <a:ext cx="5029200" cy="548640"/>
           </a:xfrm>
           <a:prstGeom prst="rect">
             <a:avLst/>
@@ -7924,7 +7815,7 @@
               <a:buNone/>
             </a:pPr>
             <a:r>
-              <a:rPr lang="en-US" sz="1100" dirty="0">
+              <a:rPr lang="en-US" sz="1300" dirty="0">
                 <a:solidFill>
                   <a:srgbClr val="141B26"/>
                 </a:solidFill>
@@ -7934,21 +7825,21 @@
             <a:pPr algn="l" indent="0" marL="0">
               <a:buNone/>
             </a:pPr>
-            <a:endParaRPr lang="en-US" sz="1100" dirty="0"/>
+            <a:endParaRPr lang="en-US" sz="1300" dirty="0"/>
           </a:p>
           <a:p>
             <a:pPr algn="l" indent="0" marL="0">
               <a:buNone/>
             </a:pPr>
             <a:r>
-              <a:rPr lang="en-US" sz="800" dirty="0">
+              <a:rPr lang="en-US" sz="900" dirty="0">
                 <a:solidFill>
                   <a:srgbClr val="5B6574"/>
                 </a:solidFill>
               </a:rPr>
               <a:t>Image: Santa Monica Mountains National Recreation Area, Public domain, via Wikimedia Commons</a:t>
             </a:r>
-            <a:endParaRPr lang="en-US" sz="1100" dirty="0"/>
+            <a:endParaRPr lang="en-US" sz="1300" dirty="0"/>
           </a:p>
         </p:txBody>
       </p:sp>
@@ -7995,16 +7886,14 @@
           <a:ln/>
         </p:spPr>
         <p:txBody>
-          <a:bodyPr wrap="square" lIns="0" tIns="0" rIns="0" bIns="0" rtlCol="0" anchor="ctr">
-            <a:normAutofit/>
-          </a:bodyPr>
+          <a:bodyPr wrap="square" lIns="0" tIns="0" rIns="0" bIns="0" rtlCol="0" anchor="ctr"/>
           <a:lstStyle/>
           <a:p>
             <a:pPr indent="0" marL="0">
               <a:buNone/>
             </a:pPr>
             <a:r>
-              <a:rPr lang="en-US" sz="1400" b="1" dirty="0">
+              <a:rPr lang="en-US" sz="1700" b="1" dirty="0">
                 <a:solidFill>
                   <a:srgbClr val="7B3A8E"/>
                 </a:solidFill>
@@ -8015,14 +7904,14 @@
               <a:buNone/>
             </a:pPr>
             <a:r>
-              <a:rPr lang="en-US" sz="1400" dirty="0">
+              <a:rPr lang="en-US" sz="1700" dirty="0">
                 <a:solidFill>
                   <a:srgbClr val="141B26"/>
                 </a:solidFill>
               </a:rPr>
               <a:t>Inherited characteristics are passed on in genetic information from both parents.</a:t>
             </a:r>
-            <a:endParaRPr lang="en-US" sz="1400" dirty="0"/>
+            <a:endParaRPr lang="en-US" sz="1700" dirty="0"/>
           </a:p>
         </p:txBody>
       </p:sp>
@@ -8205,8 +8094,8 @@
         </p:nvSpPr>
         <p:spPr>
           <a:xfrm>
-            <a:off x="548640" y="6053328"/>
-            <a:ext cx="9601200" cy="292608"/>
+            <a:off x="548640" y="6035040"/>
+            <a:ext cx="9601200" cy="310896"/>
           </a:xfrm>
           <a:prstGeom prst="rect">
             <a:avLst/>
@@ -8222,7 +8111,7 @@
               <a:buNone/>
             </a:pPr>
             <a:r>
-              <a:rPr lang="en-US" sz="1200" b="1" dirty="0">
+              <a:rPr lang="en-US" sz="1400" b="1" dirty="0">
                 <a:solidFill>
                   <a:srgbClr val="7B3A8E"/>
                 </a:solidFill>
@@ -8233,14 +8122,14 @@
               <a:buNone/>
             </a:pPr>
             <a:r>
-              <a:rPr lang="en-US" sz="1200" dirty="0">
+              <a:rPr lang="en-US" sz="1400" dirty="0">
                 <a:solidFill>
                   <a:srgbClr val="7B3A8E"/>
                 </a:solidFill>
               </a:rPr>
               <a:t>genetic information   ·   gene   ·   nucleus   ·   gamete   ·   fertilisation   ·   zygote</a:t>
             </a:r>
-            <a:endParaRPr lang="en-US" sz="1200" dirty="0"/>
+            <a:endParaRPr lang="en-US" sz="1400" dirty="0"/>
           </a:p>
         </p:txBody>
       </p:sp>
@@ -8262,81 +8151,79 @@
           <a:ln/>
         </p:spPr>
         <p:txBody>
-          <a:bodyPr wrap="square" lIns="0" tIns="0" rIns="0" bIns="0" rtlCol="0" anchor="t">
-            <a:normAutofit/>
-          </a:bodyPr>
-          <a:lstStyle/>
-          <a:p>
-            <a:pPr marL="228600" indent="-228600">
+          <a:bodyPr wrap="square" lIns="0" tIns="0" rIns="0" bIns="0" rtlCol="0" anchor="t"/>
+          <a:lstStyle/>
+          <a:p>
+            <a:pPr marL="304800" indent="-304800">
               <a:spcAft>
-                <a:spcPts val="600"/>
+                <a:spcPts val="800"/>
               </a:spcAft>
               <a:buSzPct val="100000"/>
               <a:buChar char="•"/>
             </a:pPr>
             <a:r>
-              <a:rPr lang="en-US" sz="1600" dirty="0">
+              <a:rPr lang="en-US" sz="1900" dirty="0">
                 <a:solidFill>
                   <a:srgbClr val="141B26"/>
                 </a:solidFill>
               </a:rPr>
               <a:t>Genetic information is stored in genes, in the nucleus of each cell.</a:t>
             </a:r>
-            <a:endParaRPr lang="en-US" sz="1700" dirty="0"/>
-          </a:p>
-          <a:p>
-            <a:pPr marL="228600" indent="-228600">
+            <a:endParaRPr lang="en-US" sz="1900" dirty="0"/>
+          </a:p>
+          <a:p>
+            <a:pPr marL="304800" indent="-304800">
               <a:spcAft>
-                <a:spcPts val="600"/>
+                <a:spcPts val="800"/>
               </a:spcAft>
               <a:buSzPct val="100000"/>
               <a:buChar char="•"/>
             </a:pPr>
             <a:r>
-              <a:rPr lang="en-US" sz="1600" dirty="0">
+              <a:rPr lang="en-US" sz="1900" dirty="0">
                 <a:solidFill>
                   <a:srgbClr val="141B26"/>
                 </a:solidFill>
               </a:rPr>
               <a:t>In sexual reproduction two gametes (one male, one female) fuse at fertilisation to make a zygote.</a:t>
             </a:r>
-            <a:endParaRPr lang="en-US" sz="1700" dirty="0"/>
-          </a:p>
-          <a:p>
-            <a:pPr marL="228600" indent="-228600">
+            <a:endParaRPr lang="en-US" sz="1900" dirty="0"/>
+          </a:p>
+          <a:p>
+            <a:pPr marL="304800" indent="-304800">
               <a:spcAft>
-                <a:spcPts val="600"/>
+                <a:spcPts val="800"/>
               </a:spcAft>
               <a:buSzPct val="100000"/>
               <a:buChar char="•"/>
             </a:pPr>
             <a:r>
-              <a:rPr lang="en-US" sz="1600" dirty="0">
+              <a:rPr lang="en-US" sz="1900" dirty="0">
                 <a:solidFill>
                   <a:srgbClr val="141B26"/>
                 </a:solidFill>
               </a:rPr>
               <a:t>The zygote has genetic information from both parents.</a:t>
             </a:r>
-            <a:endParaRPr lang="en-US" sz="1700" dirty="0"/>
-          </a:p>
-          <a:p>
-            <a:pPr marL="228600" indent="-228600">
+            <a:endParaRPr lang="en-US" sz="1900" dirty="0"/>
+          </a:p>
+          <a:p>
+            <a:pPr marL="304800" indent="-304800">
               <a:spcAft>
-                <a:spcPts val="600"/>
+                <a:spcPts val="800"/>
               </a:spcAft>
               <a:buSzPct val="100000"/>
               <a:buChar char="•"/>
             </a:pPr>
             <a:r>
-              <a:rPr lang="en-US" sz="1600" dirty="0">
+              <a:rPr lang="en-US" sz="1900" dirty="0">
                 <a:solidFill>
                   <a:srgbClr val="141B26"/>
                 </a:solidFill>
               </a:rPr>
               <a:t>Every gamete is slightly different, so brothers and sisters are not identical.</a:t>
             </a:r>
-            <a:endParaRPr lang="en-US" sz="1700" dirty="0"/>
+            <a:endParaRPr lang="en-US" sz="1900" dirty="0"/>
           </a:p>
         </p:txBody>
       </p:sp>
@@ -8356,8 +8243,8 @@
         </p:blipFill>
         <p:spPr>
           <a:xfrm>
-            <a:off x="5029200" y="1545336"/>
-            <a:ext cx="6583680" cy="3127248"/>
+            <a:off x="5029200" y="1600886"/>
+            <a:ext cx="6583680" cy="3016148"/>
           </a:xfrm>
           <a:prstGeom prst="rect">
             <a:avLst/>
@@ -8407,16 +8294,14 @@
           <a:ln/>
         </p:spPr>
         <p:txBody>
-          <a:bodyPr wrap="square" lIns="0" tIns="0" rIns="0" bIns="0" rtlCol="0" anchor="ctr">
-            <a:normAutofit/>
-          </a:bodyPr>
+          <a:bodyPr wrap="square" lIns="0" tIns="0" rIns="0" bIns="0" rtlCol="0" anchor="ctr"/>
           <a:lstStyle/>
           <a:p>
             <a:pPr indent="0" marL="0">
               <a:buNone/>
             </a:pPr>
             <a:r>
-              <a:rPr lang="en-US" sz="1400" b="1" dirty="0">
+              <a:rPr lang="en-US" sz="1700" b="1" dirty="0">
                 <a:solidFill>
                   <a:srgbClr val="7B3A8E"/>
                 </a:solidFill>
@@ -8427,14 +8312,14 @@
               <a:buNone/>
             </a:pPr>
             <a:r>
-              <a:rPr lang="en-US" sz="1400" dirty="0">
+              <a:rPr lang="en-US" sz="1700" dirty="0">
                 <a:solidFill>
                   <a:srgbClr val="141B26"/>
                 </a:solidFill>
               </a:rPr>
               <a:t>Two different gametes fuse, so each offspring gets its own mixture of the parents' genetic information.</a:t>
             </a:r>
-            <a:endParaRPr lang="en-US" sz="1400" dirty="0"/>
+            <a:endParaRPr lang="en-US" sz="1700" dirty="0"/>
           </a:p>
         </p:txBody>
       </p:sp>
@@ -8617,8 +8502,8 @@
         </p:nvSpPr>
         <p:spPr>
           <a:xfrm>
-            <a:off x="548640" y="6053328"/>
-            <a:ext cx="9601200" cy="292608"/>
+            <a:off x="548640" y="6035040"/>
+            <a:ext cx="9601200" cy="310896"/>
           </a:xfrm>
           <a:prstGeom prst="rect">
             <a:avLst/>
@@ -8634,7 +8519,7 @@
               <a:buNone/>
             </a:pPr>
             <a:r>
-              <a:rPr lang="en-US" sz="1200" b="1" dirty="0">
+              <a:rPr lang="en-US" sz="1400" b="1" dirty="0">
                 <a:solidFill>
                   <a:srgbClr val="7B3A8E"/>
                 </a:solidFill>
@@ -8645,14 +8530,14 @@
               <a:buNone/>
             </a:pPr>
             <a:r>
-              <a:rPr lang="en-US" sz="1200" dirty="0">
+              <a:rPr lang="en-US" sz="1400" dirty="0">
                 <a:solidFill>
                   <a:srgbClr val="7B3A8E"/>
                 </a:solidFill>
               </a:rPr>
               <a:t>continuous variation   ·   discontinuous variation</a:t>
             </a:r>
-            <a:endParaRPr lang="en-US" sz="1200" dirty="0"/>
+            <a:endParaRPr lang="en-US" sz="1400" dirty="0"/>
           </a:p>
         </p:txBody>
       </p:sp>
@@ -8708,14 +8593,14 @@
               <a:buNone/>
             </a:pPr>
             <a:r>
-              <a:rPr lang="en-US" sz="2000" b="1" dirty="0">
+              <a:rPr lang="en-US" sz="2200" b="1" dirty="0">
                 <a:solidFill>
                   <a:srgbClr val="0F2A5F"/>
                 </a:solidFill>
               </a:rPr>
               <a:t>Discontinuous (inherited)</a:t>
             </a:r>
-            <a:endParaRPr lang="en-US" sz="2000" dirty="0"/>
+            <a:endParaRPr lang="en-US" sz="2200" dirty="0"/>
           </a:p>
         </p:txBody>
       </p:sp>
@@ -8737,99 +8622,97 @@
           <a:ln/>
         </p:spPr>
         <p:txBody>
-          <a:bodyPr wrap="square" lIns="0" tIns="0" rIns="0" bIns="0" rtlCol="0" anchor="t">
-            <a:normAutofit/>
-          </a:bodyPr>
-          <a:lstStyle/>
-          <a:p>
-            <a:pPr marL="228600" indent="-228600">
+          <a:bodyPr wrap="square" lIns="0" tIns="0" rIns="0" bIns="0" rtlCol="0" anchor="t"/>
+          <a:lstStyle/>
+          <a:p>
+            <a:pPr marL="304800" indent="-304800">
               <a:spcAft>
-                <a:spcPts val="600"/>
+                <a:spcPts val="800"/>
               </a:spcAft>
               <a:buSzPct val="100000"/>
               <a:buChar char="•"/>
             </a:pPr>
             <a:r>
-              <a:rPr lang="en-US" sz="1500" dirty="0">
+              <a:rPr lang="en-US" sz="1800" dirty="0">
                 <a:solidFill>
                   <a:srgbClr val="141B26"/>
                 </a:solidFill>
               </a:rPr>
               <a:t>Blood group: A, B, AB or O. Nothing in between.</a:t>
             </a:r>
-            <a:endParaRPr lang="en-US" sz="1500" dirty="0"/>
-          </a:p>
-          <a:p>
-            <a:pPr marL="228600" indent="-228600">
+            <a:endParaRPr lang="en-US" sz="1800" dirty="0"/>
+          </a:p>
+          <a:p>
+            <a:pPr marL="304800" indent="-304800">
               <a:spcAft>
-                <a:spcPts val="600"/>
+                <a:spcPts val="800"/>
               </a:spcAft>
               <a:buSzPct val="100000"/>
               <a:buChar char="•"/>
             </a:pPr>
             <a:r>
-              <a:rPr lang="en-US" sz="1500" dirty="0">
+              <a:rPr lang="en-US" sz="1800" dirty="0">
                 <a:solidFill>
                   <a:srgbClr val="141B26"/>
                 </a:solidFill>
               </a:rPr>
               <a:t>Dimpled chin: yes or no.</a:t>
             </a:r>
-            <a:endParaRPr lang="en-US" sz="1500" dirty="0"/>
-          </a:p>
-          <a:p>
-            <a:pPr marL="228600" indent="-228600">
+            <a:endParaRPr lang="en-US" sz="1800" dirty="0"/>
+          </a:p>
+          <a:p>
+            <a:pPr marL="304800" indent="-304800">
               <a:spcAft>
-                <a:spcPts val="600"/>
+                <a:spcPts val="800"/>
               </a:spcAft>
               <a:buSzPct val="100000"/>
               <a:buChar char="•"/>
             </a:pPr>
             <a:r>
-              <a:rPr lang="en-US" sz="1500" dirty="0">
+              <a:rPr lang="en-US" sz="1800" dirty="0">
                 <a:solidFill>
                   <a:srgbClr val="141B26"/>
                 </a:solidFill>
               </a:rPr>
               <a:t>Tongue rolling, attached ear lobes.</a:t>
             </a:r>
-            <a:endParaRPr lang="en-US" sz="1500" dirty="0"/>
-          </a:p>
-          <a:p>
-            <a:pPr marL="228600" indent="-228600">
+            <a:endParaRPr lang="en-US" sz="1800" dirty="0"/>
+          </a:p>
+          <a:p>
+            <a:pPr marL="304800" indent="-304800">
               <a:spcAft>
-                <a:spcPts val="600"/>
+                <a:spcPts val="800"/>
               </a:spcAft>
               <a:buSzPct val="100000"/>
               <a:buChar char="•"/>
             </a:pPr>
             <a:r>
-              <a:rPr lang="en-US" sz="1500" dirty="0">
+              <a:rPr lang="en-US" sz="1800" dirty="0">
                 <a:solidFill>
                   <a:srgbClr val="141B26"/>
                 </a:solidFill>
               </a:rPr>
               <a:t>Usually caused by genes only.</a:t>
             </a:r>
-            <a:endParaRPr lang="en-US" sz="1500" dirty="0"/>
-          </a:p>
-          <a:p>
-            <a:pPr marL="228600" indent="-228600">
+            <a:endParaRPr lang="en-US" sz="1800" dirty="0"/>
+          </a:p>
+          <a:p>
+            <a:pPr marL="304800" indent="-304800">
               <a:spcAft>
-                <a:spcPts val="600"/>
+                <a:spcPts val="800"/>
               </a:spcAft>
               <a:buSzPct val="100000"/>
               <a:buChar char="•"/>
             </a:pPr>
             <a:r>
-              <a:rPr lang="en-US" sz="1500" dirty="0">
+              <a:rPr lang="en-US" sz="1800" dirty="0">
                 <a:solidFill>
                   <a:srgbClr val="141B26"/>
                 </a:solidFill>
               </a:rPr>
               <a:t>Bar chart with gaps.</a:t>
             </a:r>
-            <a:endParaRPr lang="en-US" sz="1500" dirty="0"/>
+            <a:endParaRPr lang="en-US" sz="1800" dirty="0"/>
           </a:p>
         </p:txBody>
       </p:sp>
@@ -8885,14 +8768,14 @@
               <a:buNone/>
             </a:pPr>
             <a:r>
-              <a:rPr lang="en-US" sz="2000" b="1" dirty="0">
+              <a:rPr lang="en-US" sz="2200" b="1" dirty="0">
                 <a:solidFill>
                   <a:srgbClr val="0F2A5F"/>
                 </a:solidFill>
               </a:rPr>
               <a:t>Continuous (inherited and environment)</a:t>
             </a:r>
-            <a:endParaRPr lang="en-US" sz="2000" dirty="0"/>
+            <a:endParaRPr lang="en-US" sz="2200" dirty="0"/>
           </a:p>
         </p:txBody>
       </p:sp>
@@ -8914,99 +8797,97 @@
           <a:ln/>
         </p:spPr>
         <p:txBody>
-          <a:bodyPr wrap="square" lIns="0" tIns="0" rIns="0" bIns="0" rtlCol="0" anchor="t">
-            <a:normAutofit/>
-          </a:bodyPr>
-          <a:lstStyle/>
-          <a:p>
-            <a:pPr marL="228600" indent="-228600">
+          <a:bodyPr wrap="square" lIns="0" tIns="0" rIns="0" bIns="0" rtlCol="0" anchor="t"/>
+          <a:lstStyle/>
+          <a:p>
+            <a:pPr marL="304800" indent="-304800">
               <a:spcAft>
-                <a:spcPts val="600"/>
+                <a:spcPts val="800"/>
               </a:spcAft>
               <a:buSzPct val="100000"/>
               <a:buChar char="•"/>
             </a:pPr>
             <a:r>
-              <a:rPr lang="en-US" sz="1500" dirty="0">
+              <a:rPr lang="en-US" sz="1800" dirty="0">
                 <a:solidFill>
                   <a:srgbClr val="141B26"/>
                 </a:solidFill>
               </a:rPr>
               <a:t>Height, hand span, skin colour.</a:t>
             </a:r>
-            <a:endParaRPr lang="en-US" sz="1500" dirty="0"/>
-          </a:p>
-          <a:p>
-            <a:pPr marL="228600" indent="-228600">
+            <a:endParaRPr lang="en-US" sz="1800" dirty="0"/>
+          </a:p>
+          <a:p>
+            <a:pPr marL="304800" indent="-304800">
               <a:spcAft>
-                <a:spcPts val="600"/>
+                <a:spcPts val="800"/>
               </a:spcAft>
               <a:buSzPct val="100000"/>
               <a:buChar char="•"/>
             </a:pPr>
             <a:r>
-              <a:rPr lang="en-US" sz="1500" dirty="0">
+              <a:rPr lang="en-US" sz="1800" dirty="0">
                 <a:solidFill>
                   <a:srgbClr val="141B26"/>
                 </a:solidFill>
               </a:rPr>
               <a:t>Any value between two points.</a:t>
             </a:r>
-            <a:endParaRPr lang="en-US" sz="1500" dirty="0"/>
-          </a:p>
-          <a:p>
-            <a:pPr marL="228600" indent="-228600">
+            <a:endParaRPr lang="en-US" sz="1800" dirty="0"/>
+          </a:p>
+          <a:p>
+            <a:pPr marL="304800" indent="-304800">
               <a:spcAft>
-                <a:spcPts val="600"/>
+                <a:spcPts val="800"/>
               </a:spcAft>
               <a:buSzPct val="100000"/>
               <a:buChar char="•"/>
             </a:pPr>
             <a:r>
-              <a:rPr lang="en-US" sz="1500" dirty="0">
+              <a:rPr lang="en-US" sz="1800" dirty="0">
                 <a:solidFill>
                   <a:srgbClr val="141B26"/>
                 </a:solidFill>
               </a:rPr>
               <a:t>Affected by genes and by diet, sunlight or exercise.</a:t>
             </a:r>
-            <a:endParaRPr lang="en-US" sz="1500" dirty="0"/>
-          </a:p>
-          <a:p>
-            <a:pPr marL="228600" indent="-228600">
+            <a:endParaRPr lang="en-US" sz="1800" dirty="0"/>
+          </a:p>
+          <a:p>
+            <a:pPr marL="304800" indent="-304800">
               <a:spcAft>
-                <a:spcPts val="600"/>
+                <a:spcPts val="800"/>
               </a:spcAft>
               <a:buSzPct val="100000"/>
               <a:buChar char="•"/>
             </a:pPr>
             <a:r>
-              <a:rPr lang="en-US" sz="1500" dirty="0">
+              <a:rPr lang="en-US" sz="1800" dirty="0">
                 <a:solidFill>
                   <a:srgbClr val="141B26"/>
                 </a:solidFill>
               </a:rPr>
               <a:t>Group the data; bars touch.</a:t>
             </a:r>
-            <a:endParaRPr lang="en-US" sz="1500" dirty="0"/>
-          </a:p>
-          <a:p>
-            <a:pPr marL="228600" indent="-228600">
+            <a:endParaRPr lang="en-US" sz="1800" dirty="0"/>
+          </a:p>
+          <a:p>
+            <a:pPr marL="304800" indent="-304800">
               <a:spcAft>
-                <a:spcPts val="600"/>
+                <a:spcPts val="800"/>
               </a:spcAft>
               <a:buSzPct val="100000"/>
               <a:buChar char="•"/>
             </a:pPr>
             <a:r>
-              <a:rPr lang="en-US" sz="1500" dirty="0">
+              <a:rPr lang="en-US" sz="1800" dirty="0">
                 <a:solidFill>
                   <a:srgbClr val="141B26"/>
                 </a:solidFill>
               </a:rPr>
               <a:t>Often a bell shape.</a:t>
             </a:r>
-            <a:endParaRPr lang="en-US" sz="1500" dirty="0"/>
+            <a:endParaRPr lang="en-US" sz="1800" dirty="0"/>
           </a:p>
         </p:txBody>
       </p:sp>
@@ -9053,16 +8934,14 @@
           <a:ln/>
         </p:spPr>
         <p:txBody>
-          <a:bodyPr wrap="square" lIns="0" tIns="0" rIns="0" bIns="0" rtlCol="0" anchor="ctr">
-            <a:normAutofit/>
-          </a:bodyPr>
+          <a:bodyPr wrap="square" lIns="0" tIns="0" rIns="0" bIns="0" rtlCol="0" anchor="ctr"/>
           <a:lstStyle/>
           <a:p>
             <a:pPr indent="0" marL="0">
               <a:buNone/>
             </a:pPr>
             <a:r>
-              <a:rPr lang="en-US" sz="1400" b="1" dirty="0">
+              <a:rPr lang="en-US" sz="1700" b="1" dirty="0">
                 <a:solidFill>
                   <a:srgbClr val="7B3A8E"/>
                 </a:solidFill>
@@ -9073,14 +8952,14 @@
               <a:buNone/>
             </a:pPr>
             <a:r>
-              <a:rPr lang="en-US" sz="1400" dirty="0">
+              <a:rPr lang="en-US" sz="1700" dirty="0">
                 <a:solidFill>
                   <a:srgbClr val="141B26"/>
                 </a:solidFill>
               </a:rPr>
               <a:t>Discontinuous: a limited set of values. Continuous: any value, and usually many genes plus the environment.</a:t>
             </a:r>
-            <a:endParaRPr lang="en-US" sz="1400" dirty="0"/>
+            <a:endParaRPr lang="en-US" sz="1700" dirty="0"/>
           </a:p>
         </p:txBody>
       </p:sp>
@@ -9263,8 +9142,8 @@
         </p:nvSpPr>
         <p:spPr>
           <a:xfrm>
-            <a:off x="548640" y="6053328"/>
-            <a:ext cx="9601200" cy="292608"/>
+            <a:off x="548640" y="6035040"/>
+            <a:ext cx="9601200" cy="310896"/>
           </a:xfrm>
           <a:prstGeom prst="rect">
             <a:avLst/>
@@ -9280,7 +9159,7 @@
               <a:buNone/>
             </a:pPr>
             <a:r>
-              <a:rPr lang="en-US" sz="1200" b="1" dirty="0">
+              <a:rPr lang="en-US" sz="1400" b="1" dirty="0">
                 <a:solidFill>
                   <a:srgbClr val="7B3A8E"/>
                 </a:solidFill>
@@ -9291,14 +9170,14 @@
               <a:buNone/>
             </a:pPr>
             <a:r>
-              <a:rPr lang="en-US" sz="1200" dirty="0">
+              <a:rPr lang="en-US" sz="1400" dirty="0">
                 <a:solidFill>
                   <a:srgbClr val="7B3A8E"/>
                 </a:solidFill>
               </a:rPr>
               <a:t>discontinuous variation</a:t>
             </a:r>
-            <a:endParaRPr lang="en-US" sz="1200" dirty="0"/>
+            <a:endParaRPr lang="en-US" sz="1400" dirty="0"/>
           </a:p>
         </p:txBody>
       </p:sp>
@@ -9336,81 +9215,79 @@
           <a:ln/>
         </p:spPr>
         <p:txBody>
-          <a:bodyPr wrap="square" lIns="0" tIns="0" rIns="0" bIns="0" rtlCol="0" anchor="t">
-            <a:normAutofit/>
-          </a:bodyPr>
-          <a:lstStyle/>
-          <a:p>
-            <a:pPr marL="228600" indent="-228600">
+          <a:bodyPr wrap="square" lIns="0" tIns="0" rIns="0" bIns="0" rtlCol="0" anchor="t"/>
+          <a:lstStyle/>
+          <a:p>
+            <a:pPr marL="304800" indent="-304800">
               <a:spcAft>
-                <a:spcPts val="600"/>
+                <a:spcPts val="800"/>
               </a:spcAft>
               <a:buSzPct val="100000"/>
               <a:buChar char="•"/>
             </a:pPr>
             <a:r>
-              <a:rPr lang="en-US" sz="1500" dirty="0">
+              <a:rPr lang="en-US" sz="1800" dirty="0">
                 <a:solidFill>
                   <a:srgbClr val="141B26"/>
                 </a:solidFill>
               </a:rPr>
               <a:t>Only four possible values, so the bars have gaps.</a:t>
             </a:r>
-            <a:endParaRPr lang="en-US" sz="1500" dirty="0"/>
-          </a:p>
-          <a:p>
-            <a:pPr marL="228600" indent="-228600">
+            <a:endParaRPr lang="en-US" sz="1800" dirty="0"/>
+          </a:p>
+          <a:p>
+            <a:pPr marL="304800" indent="-304800">
               <a:spcAft>
-                <a:spcPts val="600"/>
+                <a:spcPts val="800"/>
               </a:spcAft>
               <a:buSzPct val="100000"/>
               <a:buChar char="•"/>
             </a:pPr>
             <a:r>
-              <a:rPr lang="en-US" sz="1500" dirty="0">
+              <a:rPr lang="en-US" sz="1800" dirty="0">
                 <a:solidFill>
                   <a:srgbClr val="141B26"/>
                 </a:solidFill>
               </a:rPr>
               <a:t>Which blood group is most common?</a:t>
             </a:r>
-            <a:endParaRPr lang="en-US" sz="1500" dirty="0"/>
-          </a:p>
-          <a:p>
-            <a:pPr marL="228600" indent="-228600">
+            <a:endParaRPr lang="en-US" sz="1800" dirty="0"/>
+          </a:p>
+          <a:p>
+            <a:pPr marL="304800" indent="-304800">
               <a:spcAft>
-                <a:spcPts val="600"/>
+                <a:spcPts val="800"/>
               </a:spcAft>
               <a:buSzPct val="100000"/>
               <a:buChar char="•"/>
             </a:pPr>
             <a:r>
-              <a:rPr lang="en-US" sz="1500" dirty="0">
+              <a:rPr lang="en-US" sz="1800" dirty="0">
                 <a:solidFill>
                   <a:srgbClr val="141B26"/>
                 </a:solidFill>
               </a:rPr>
               <a:t>Roughly what percentage of this sample has group A?</a:t>
             </a:r>
-            <a:endParaRPr lang="en-US" sz="1500" dirty="0"/>
-          </a:p>
-          <a:p>
-            <a:pPr marL="228600" indent="-228600">
+            <a:endParaRPr lang="en-US" sz="1800" dirty="0"/>
+          </a:p>
+          <a:p>
+            <a:pPr marL="304800" indent="-304800">
               <a:spcAft>
-                <a:spcPts val="600"/>
+                <a:spcPts val="800"/>
               </a:spcAft>
               <a:buSzPct val="100000"/>
               <a:buChar char="•"/>
             </a:pPr>
             <a:r>
-              <a:rPr lang="en-US" sz="1500" dirty="0">
+              <a:rPr lang="en-US" sz="1800" dirty="0">
                 <a:solidFill>
                   <a:srgbClr val="141B26"/>
                 </a:solidFill>
               </a:rPr>
               <a:t>Could anyone be 'between' A and B?</a:t>
             </a:r>
-            <a:endParaRPr lang="en-US" sz="1500" dirty="0"/>
+            <a:endParaRPr lang="en-US" sz="1800" dirty="0"/>
           </a:p>
         </p:txBody>
       </p:sp>
@@ -9457,16 +9334,14 @@
           <a:ln/>
         </p:spPr>
         <p:txBody>
-          <a:bodyPr wrap="square" lIns="0" tIns="0" rIns="0" bIns="0" rtlCol="0" anchor="ctr">
-            <a:normAutofit/>
-          </a:bodyPr>
+          <a:bodyPr wrap="square" lIns="0" tIns="0" rIns="0" bIns="0" rtlCol="0" anchor="ctr"/>
           <a:lstStyle/>
           <a:p>
             <a:pPr indent="0" marL="0">
               <a:buNone/>
             </a:pPr>
             <a:r>
-              <a:rPr lang="en-US" sz="1400" b="1" dirty="0">
+              <a:rPr lang="en-US" sz="1700" b="1" dirty="0">
                 <a:solidFill>
                   <a:srgbClr val="7B3A8E"/>
                 </a:solidFill>
@@ -9477,14 +9352,14 @@
               <a:buNone/>
             </a:pPr>
             <a:r>
-              <a:rPr lang="en-US" sz="1400" dirty="0">
+              <a:rPr lang="en-US" sz="1700" dirty="0">
                 <a:solidFill>
                   <a:srgbClr val="141B26"/>
                 </a:solidFill>
               </a:rPr>
               <a:t>Discontinuous data go on a bar chart with gaps between the bars.</a:t>
             </a:r>
-            <a:endParaRPr lang="en-US" sz="1400" dirty="0"/>
+            <a:endParaRPr lang="en-US" sz="1700" dirty="0"/>
           </a:p>
         </p:txBody>
       </p:sp>
@@ -9667,8 +9542,8 @@
         </p:nvSpPr>
         <p:spPr>
           <a:xfrm>
-            <a:off x="548640" y="6053328"/>
-            <a:ext cx="9601200" cy="292608"/>
+            <a:off x="548640" y="6035040"/>
+            <a:ext cx="9601200" cy="310896"/>
           </a:xfrm>
           <a:prstGeom prst="rect">
             <a:avLst/>
@@ -9684,7 +9559,7 @@
               <a:buNone/>
             </a:pPr>
             <a:r>
-              <a:rPr lang="en-US" sz="1200" b="1" dirty="0">
+              <a:rPr lang="en-US" sz="1400" b="1" dirty="0">
                 <a:solidFill>
                   <a:srgbClr val="7B3A8E"/>
                 </a:solidFill>
@@ -9695,14 +9570,14 @@
               <a:buNone/>
             </a:pPr>
             <a:r>
-              <a:rPr lang="en-US" sz="1200" dirty="0">
+              <a:rPr lang="en-US" sz="1400" dirty="0">
                 <a:solidFill>
                   <a:srgbClr val="7B3A8E"/>
                 </a:solidFill>
               </a:rPr>
               <a:t>continuous variation   ·   normal distribution</a:t>
             </a:r>
-            <a:endParaRPr lang="en-US" sz="1200" dirty="0"/>
+            <a:endParaRPr lang="en-US" sz="1400" dirty="0"/>
           </a:p>
         </p:txBody>
       </p:sp>
@@ -9740,63 +9615,61 @@
           <a:ln/>
         </p:spPr>
         <p:txBody>
-          <a:bodyPr wrap="square" lIns="0" tIns="0" rIns="0" bIns="0" rtlCol="0" anchor="t">
-            <a:normAutofit/>
-          </a:bodyPr>
-          <a:lstStyle/>
-          <a:p>
-            <a:pPr marL="228600" indent="-228600">
+          <a:bodyPr wrap="square" lIns="0" tIns="0" rIns="0" bIns="0" rtlCol="0" anchor="t"/>
+          <a:lstStyle/>
+          <a:p>
+            <a:pPr marL="304800" indent="-304800">
               <a:spcAft>
-                <a:spcPts val="600"/>
+                <a:spcPts val="800"/>
               </a:spcAft>
               <a:buSzPct val="100000"/>
               <a:buChar char="•"/>
             </a:pPr>
             <a:r>
-              <a:rPr lang="en-US" sz="1500" dirty="0">
+              <a:rPr lang="en-US" sz="1800" dirty="0">
                 <a:solidFill>
                   <a:srgbClr val="141B26"/>
                 </a:solidFill>
               </a:rPr>
               <a:t>Heights are grouped, so the bars touch.</a:t>
             </a:r>
-            <a:endParaRPr lang="en-US" sz="1500" dirty="0"/>
-          </a:p>
-          <a:p>
-            <a:pPr marL="228600" indent="-228600">
+            <a:endParaRPr lang="en-US" sz="1800" dirty="0"/>
+          </a:p>
+          <a:p>
+            <a:pPr marL="304800" indent="-304800">
               <a:spcAft>
-                <a:spcPts val="600"/>
+                <a:spcPts val="800"/>
               </a:spcAft>
               <a:buSzPct val="100000"/>
               <a:buChar char="•"/>
             </a:pPr>
             <a:r>
-              <a:rPr lang="en-US" sz="1500" dirty="0">
+              <a:rPr lang="en-US" sz="1800" dirty="0">
                 <a:solidFill>
                   <a:srgbClr val="141B26"/>
                 </a:solidFill>
               </a:rPr>
               <a:t>Join the tops of the bars: a bell shape. This is a normal distribution.</a:t>
             </a:r>
-            <a:endParaRPr lang="en-US" sz="1500" dirty="0"/>
-          </a:p>
-          <a:p>
-            <a:pPr marL="228600" indent="-228600">
+            <a:endParaRPr lang="en-US" sz="1800" dirty="0"/>
+          </a:p>
+          <a:p>
+            <a:pPr marL="304800" indent="-304800">
               <a:spcAft>
-                <a:spcPts val="600"/>
+                <a:spcPts val="800"/>
               </a:spcAft>
               <a:buSzPct val="100000"/>
               <a:buChar char="•"/>
             </a:pPr>
             <a:r>
-              <a:rPr lang="en-US" sz="1500" dirty="0">
+              <a:rPr lang="en-US" sz="1800" dirty="0">
                 <a:solidFill>
                   <a:srgbClr val="141B26"/>
                 </a:solidFill>
               </a:rPr>
               <a:t>Most students are near the middle; very tall and very short students are rare.</a:t>
             </a:r>
-            <a:endParaRPr lang="en-US" sz="1500" dirty="0"/>
+            <a:endParaRPr lang="en-US" sz="1800" dirty="0"/>
           </a:p>
         </p:txBody>
       </p:sp>
@@ -9843,16 +9716,14 @@
           <a:ln/>
         </p:spPr>
         <p:txBody>
-          <a:bodyPr wrap="square" lIns="0" tIns="0" rIns="0" bIns="0" rtlCol="0" anchor="ctr">
-            <a:normAutofit/>
-          </a:bodyPr>
+          <a:bodyPr wrap="square" lIns="0" tIns="0" rIns="0" bIns="0" rtlCol="0" anchor="ctr"/>
           <a:lstStyle/>
           <a:p>
             <a:pPr indent="0" marL="0">
               <a:buNone/>
             </a:pPr>
             <a:r>
-              <a:rPr lang="en-US" sz="1400" b="1" dirty="0">
+              <a:rPr lang="en-US" sz="1700" b="1" dirty="0">
                 <a:solidFill>
                   <a:srgbClr val="7B3A8E"/>
                 </a:solidFill>
@@ -9863,14 +9734,14 @@
               <a:buNone/>
             </a:pPr>
             <a:r>
-              <a:rPr lang="en-US" sz="1400" dirty="0">
+              <a:rPr lang="en-US" sz="1700" dirty="0">
                 <a:solidFill>
                   <a:srgbClr val="141B26"/>
                 </a:solidFill>
               </a:rPr>
               <a:t>Grouped continuous data often give a bell-shaped normal distribution.</a:t>
             </a:r>
-            <a:endParaRPr lang="en-US" sz="1400" dirty="0"/>
+            <a:endParaRPr lang="en-US" sz="1700" dirty="0"/>
           </a:p>
         </p:txBody>
       </p:sp>
